--- a/Training Materials/19. MongoDB 8.2/Slides/5. Indexing/5-mongodb-introduction-m5-slides.pptx
+++ b/Training Materials/19. MongoDB 8.2/Slides/5. Indexing/5-mongodb-introduction-m5-slides.pptx
@@ -8,16 +8,17 @@
     <p:notesMasterId r:id="rId11"/>
   </p:notesMasterIdLst>
   <p:sldIdLst>
-    <p:sldId id="264" r:id="rId3"/>
-    <p:sldId id="257" r:id="rId4"/>
-    <p:sldId id="258" r:id="rId5"/>
-    <p:sldId id="259" r:id="rId6"/>
-    <p:sldId id="260" r:id="rId7"/>
-    <p:sldId id="261" r:id="rId8"/>
+    <p:sldId id="264" r:id="rId2"/>
+    <p:sldId id="257" r:id="rId3"/>
+    <p:sldId id="258" r:id="rId4"/>
+    <p:sldId id="259" r:id="rId5"/>
+    <p:sldId id="260" r:id="rId6"/>
+    <p:sldId id="261" r:id="rId7"/>
+    <p:sldId id="265" r:id="rId8"/>
     <p:sldId id="262" r:id="rId9"/>
     <p:sldId id="263" r:id="rId10"/>
   </p:sldIdLst>
-  <p:sldSz cx="9144000" cy="6858000"/>
+  <p:sldSz cx="9144000" cy="6858000" type="screen4x3"/>
   <p:notesSz cx="9144000" cy="6858000"/>
   <p:defaultTextStyle>
     <a:lvl1pPr marL="0" algn="l" defTabSz="914400" rtl="0" eaLnBrk="1" latinLnBrk="0" hangingPunct="1">
@@ -111,6 +112,22 @@
       </a:defRPr>
     </a:lvl9pPr>
   </p:defaultTextStyle>
+  <p:extLst>
+    <p:ext uri="{EFAFB233-063F-42B5-8137-9DF3F51BA10A}">
+      <p15:sldGuideLst xmlns:p15="http://schemas.microsoft.com/office/powerpoint/2012/main">
+        <p15:guide id="1" orient="horz" pos="2880">
+          <p15:clr>
+            <a:srgbClr val="A4A3A4"/>
+          </p15:clr>
+        </p15:guide>
+        <p15:guide id="2" pos="2160">
+          <p15:clr>
+            <a:srgbClr val="A4A3A4"/>
+          </p15:clr>
+        </p15:guide>
+      </p15:sldGuideLst>
+    </p:ext>
+  </p:extLst>
 </p:presentation>
 </file>
 
@@ -196,6 +213,7 @@
           <a:p>
             <a:fld id="{3EFD42F7-718C-4B98-AAEC-167E6DDD60A7}" type="datetimeFigureOut">
               <a:rPr lang="en-US" smtClean="0"/>
+              <a:t>2/7/2026</a:t>
             </a:fld>
             <a:endParaRPr lang="en-US"/>
           </a:p>
@@ -259,42 +277,37 @@
           <a:p>
             <a:pPr lvl="0"/>
             <a:r>
-              <a:rPr lang="en-US" smtClean="0"/>
+              <a:rPr lang="en-US"/>
               <a:t>Click to edit Master text styles</a:t>
             </a:r>
-            <a:endParaRPr lang="en-US" smtClean="0"/>
           </a:p>
           <a:p>
             <a:pPr lvl="1"/>
             <a:r>
-              <a:rPr lang="en-US" smtClean="0"/>
+              <a:rPr lang="en-US"/>
               <a:t>Second level</a:t>
             </a:r>
-            <a:endParaRPr lang="en-US" smtClean="0"/>
           </a:p>
           <a:p>
             <a:pPr lvl="2"/>
             <a:r>
-              <a:rPr lang="en-US" smtClean="0"/>
+              <a:rPr lang="en-US"/>
               <a:t>Third level</a:t>
             </a:r>
-            <a:endParaRPr lang="en-US" smtClean="0"/>
           </a:p>
           <a:p>
             <a:pPr lvl="3"/>
             <a:r>
-              <a:rPr lang="en-US" smtClean="0"/>
+              <a:rPr lang="en-US"/>
               <a:t>Fourth level</a:t>
             </a:r>
-            <a:endParaRPr lang="en-US" smtClean="0"/>
           </a:p>
           <a:p>
             <a:pPr lvl="4"/>
             <a:r>
-              <a:rPr lang="en-US" smtClean="0"/>
+              <a:rPr lang="en-US"/>
               <a:t>Fifth level</a:t>
             </a:r>
-            <a:endParaRPr lang="en-US"/>
           </a:p>
         </p:txBody>
       </p:sp>
@@ -358,6 +371,7 @@
           <a:p>
             <a:fld id="{21B2AA4F-B828-4D7C-AFD3-893933DAFCB4}" type="slidenum">
               <a:rPr lang="en-US" smtClean="0"/>
+              <a:t>‹#›</a:t>
             </a:fld>
             <a:endParaRPr lang="en-US"/>
           </a:p>
@@ -512,7 +526,9 @@
               </a:defRPr>
             </a:lvl1pPr>
           </a:lstStyle>
-          <a:p/>
+          <a:p>
+            <a:endParaRPr/>
+          </a:p>
         </p:txBody>
       </p:sp>
       <p:sp>
@@ -543,7 +559,9 @@
               <a:defRPr/>
             </a:lvl1pPr>
           </a:lstStyle>
-          <a:p/>
+          <a:p>
+            <a:endParaRPr/>
+          </a:p>
         </p:txBody>
       </p:sp>
       <p:sp>
@@ -570,7 +588,9 @@
               </a:defRPr>
             </a:lvl1pPr>
           </a:lstStyle>
-          <a:p/>
+          <a:p>
+            <a:endParaRPr/>
+          </a:p>
         </p:txBody>
       </p:sp>
       <p:sp>
@@ -600,6 +620,7 @@
           <a:p>
             <a:fld id="{1D8BD707-D9CF-40AE-B4C6-C98DA3205C09}" type="datetimeFigureOut">
               <a:rPr lang="en-US"/>
+              <a:t>2/7/2026</a:t>
             </a:fld>
             <a:endParaRPr lang="en-US"/>
           </a:p>
@@ -632,6 +653,7 @@
           <a:p>
             <a:fld id="{B6F15528-21DE-4FAA-801E-634DDDAF4B2B}" type="slidenum">
               <a:rPr/>
+              <a:t>‹#›</a:t>
             </a:fld>
             <a:endParaRPr/>
           </a:p>
@@ -687,7 +709,9 @@
               </a:defRPr>
             </a:lvl1pPr>
           </a:lstStyle>
-          <a:p/>
+          <a:p>
+            <a:endParaRPr/>
+          </a:p>
         </p:txBody>
       </p:sp>
       <p:sp>
@@ -714,7 +738,9 @@
               </a:defRPr>
             </a:lvl1pPr>
           </a:lstStyle>
-          <a:p/>
+          <a:p>
+            <a:endParaRPr/>
+          </a:p>
         </p:txBody>
       </p:sp>
       <p:sp>
@@ -741,7 +767,9 @@
               </a:defRPr>
             </a:lvl1pPr>
           </a:lstStyle>
-          <a:p/>
+          <a:p>
+            <a:endParaRPr/>
+          </a:p>
         </p:txBody>
       </p:sp>
       <p:sp>
@@ -771,6 +799,7 @@
           <a:p>
             <a:fld id="{1D8BD707-D9CF-40AE-B4C6-C98DA3205C09}" type="datetimeFigureOut">
               <a:rPr lang="en-US"/>
+              <a:t>2/7/2026</a:t>
             </a:fld>
             <a:endParaRPr lang="en-US"/>
           </a:p>
@@ -803,6 +832,7 @@
           <a:p>
             <a:fld id="{B6F15528-21DE-4FAA-801E-634DDDAF4B2B}" type="slidenum">
               <a:rPr/>
+              <a:t>‹#›</a:t>
             </a:fld>
             <a:endParaRPr/>
           </a:p>
@@ -858,7 +888,9 @@
               </a:defRPr>
             </a:lvl1pPr>
           </a:lstStyle>
-          <a:p/>
+          <a:p>
+            <a:endParaRPr/>
+          </a:p>
         </p:txBody>
       </p:sp>
       <p:sp>
@@ -889,7 +921,9 @@
               <a:defRPr/>
             </a:lvl1pPr>
           </a:lstStyle>
-          <a:p/>
+          <a:p>
+            <a:endParaRPr/>
+          </a:p>
         </p:txBody>
       </p:sp>
       <p:sp>
@@ -920,7 +954,9 @@
               <a:defRPr/>
             </a:lvl1pPr>
           </a:lstStyle>
-          <a:p/>
+          <a:p>
+            <a:endParaRPr/>
+          </a:p>
         </p:txBody>
       </p:sp>
       <p:sp>
@@ -947,7 +983,9 @@
               </a:defRPr>
             </a:lvl1pPr>
           </a:lstStyle>
-          <a:p/>
+          <a:p>
+            <a:endParaRPr/>
+          </a:p>
         </p:txBody>
       </p:sp>
       <p:sp>
@@ -977,6 +1015,7 @@
           <a:p>
             <a:fld id="{1D8BD707-D9CF-40AE-B4C6-C98DA3205C09}" type="datetimeFigureOut">
               <a:rPr lang="en-US"/>
+              <a:t>2/7/2026</a:t>
             </a:fld>
             <a:endParaRPr lang="en-US"/>
           </a:p>
@@ -1009,6 +1048,7 @@
           <a:p>
             <a:fld id="{B6F15528-21DE-4FAA-801E-634DDDAF4B2B}" type="slidenum">
               <a:rPr/>
+              <a:t>‹#›</a:t>
             </a:fld>
             <a:endParaRPr/>
           </a:p>
@@ -1064,7 +1104,9 @@
               </a:defRPr>
             </a:lvl1pPr>
           </a:lstStyle>
-          <a:p/>
+          <a:p>
+            <a:endParaRPr/>
+          </a:p>
         </p:txBody>
       </p:sp>
       <p:sp>
@@ -1091,7 +1133,9 @@
               </a:defRPr>
             </a:lvl1pPr>
           </a:lstStyle>
-          <a:p/>
+          <a:p>
+            <a:endParaRPr/>
+          </a:p>
         </p:txBody>
       </p:sp>
       <p:sp>
@@ -1121,6 +1165,7 @@
           <a:p>
             <a:fld id="{1D8BD707-D9CF-40AE-B4C6-C98DA3205C09}" type="datetimeFigureOut">
               <a:rPr lang="en-US"/>
+              <a:t>2/7/2026</a:t>
             </a:fld>
             <a:endParaRPr lang="en-US"/>
           </a:p>
@@ -1153,6 +1198,7 @@
           <a:p>
             <a:fld id="{B6F15528-21DE-4FAA-801E-634DDDAF4B2B}" type="slidenum">
               <a:rPr/>
+              <a:t>‹#›</a:t>
             </a:fld>
             <a:endParaRPr/>
           </a:p>
@@ -1208,7 +1254,9 @@
               </a:defRPr>
             </a:lvl1pPr>
           </a:lstStyle>
-          <a:p/>
+          <a:p>
+            <a:endParaRPr/>
+          </a:p>
         </p:txBody>
       </p:sp>
       <p:sp>
@@ -1238,6 +1286,7 @@
           <a:p>
             <a:fld id="{1D8BD707-D9CF-40AE-B4C6-C98DA3205C09}" type="datetimeFigureOut">
               <a:rPr lang="en-US"/>
+              <a:t>2/7/2026</a:t>
             </a:fld>
             <a:endParaRPr lang="en-US"/>
           </a:p>
@@ -1270,6 +1319,7 @@
           <a:p>
             <a:fld id="{B6F15528-21DE-4FAA-801E-634DDDAF4B2B}" type="slidenum">
               <a:rPr/>
+              <a:t>‹#›</a:t>
             </a:fld>
             <a:endParaRPr/>
           </a:p>
@@ -1343,7 +1393,9 @@
               </a:defRPr>
             </a:lvl1pPr>
           </a:lstStyle>
-          <a:p/>
+          <a:p>
+            <a:endParaRPr/>
+          </a:p>
         </p:txBody>
       </p:sp>
       <p:sp>
@@ -1380,7 +1432,9 @@
               </a:defRPr>
             </a:lvl1pPr>
           </a:lstStyle>
-          <a:p/>
+          <a:p>
+            <a:endParaRPr/>
+          </a:p>
         </p:txBody>
       </p:sp>
       <p:sp>
@@ -1417,7 +1471,9 @@
               </a:defRPr>
             </a:lvl1pPr>
           </a:lstStyle>
-          <a:p/>
+          <a:p>
+            <a:endParaRPr/>
+          </a:p>
         </p:txBody>
       </p:sp>
       <p:sp>
@@ -1457,6 +1513,7 @@
           <a:p>
             <a:fld id="{1D8BD707-D9CF-40AE-B4C6-C98DA3205C09}" type="datetimeFigureOut">
               <a:rPr lang="en-US"/>
+              <a:t>2/7/2026</a:t>
             </a:fld>
             <a:endParaRPr lang="en-US"/>
           </a:p>
@@ -1499,6 +1556,7 @@
           <a:p>
             <a:fld id="{B6F15528-21DE-4FAA-801E-634DDDAF4B2B}" type="slidenum">
               <a:rPr/>
+              <a:t>‹#›</a:t>
             </a:fld>
             <a:endParaRPr/>
           </a:p>
@@ -1679,7 +1737,9 @@
       <p:graphicFrame>
         <p:nvGraphicFramePr>
           <p:cNvPr id="5" name="Content Placeholder 4"/>
-          <p:cNvGraphicFramePr/>
+          <p:cNvGraphicFramePr>
+            <a:graphicFrameLocks noGrp="1"/>
+          </p:cNvGraphicFramePr>
           <p:nvPr>
             <p:ph sz="half" idx="2"/>
           </p:nvPr>
@@ -1692,12 +1752,12 @@
           <a:graphicData uri="http://schemas.openxmlformats.org/presentationml/2006/ole">
             <mc:AlternateContent xmlns:mc="http://schemas.openxmlformats.org/markup-compatibility/2006">
               <mc:Choice xmlns:v="urn:schemas-microsoft-com:vml" Requires="v">
-                <p:oleObj spid="_x0000_s6" name="" r:id="rId1" imgW="8877300" imgH="6791325" progId="Paint.Picture">
+                <p:oleObj r:id="rId2" imgW="8877300" imgH="6791325" progId="Paint.Picture">
                   <p:embed/>
                 </p:oleObj>
               </mc:Choice>
               <mc:Fallback>
-                <p:oleObj name="" r:id="rId1" imgW="8877300" imgH="6791325" progId="Paint.Picture">
+                <p:oleObj r:id="rId2" imgW="8877300" imgH="6791325" progId="Paint.Picture">
                   <p:embed/>
                   <p:pic>
                     <p:nvPicPr>
@@ -1706,7 +1766,7 @@
                       <p:nvPr/>
                     </p:nvPicPr>
                     <p:blipFill>
-                      <a:blip r:embed="rId2"/>
+                      <a:blip r:embed="rId3"/>
                       <a:stretch>
                         <a:fillRect/>
                       </a:stretch>
@@ -1740,9 +1800,11 @@
         <p:spPr/>
         <p:txBody>
           <a:bodyPr/>
+          <a:lstStyle/>
           <a:p>
             <a:fld id="{B6F15528-21DE-4FAA-801E-634DDDAF4B2B}" type="slidenum">
               <a:rPr/>
+              <a:t>1</a:t>
             </a:fld>
             <a:endParaRPr/>
           </a:p>
@@ -1852,11 +1914,7 @@
             </a:r>
             <a:r>
               <a:rPr sz="3200" spc="-145" dirty="0"/>
-              <a:t>n</a:t>
-            </a:r>
-            <a:r>
-              <a:rPr sz="3200" spc="-145" dirty="0"/>
-              <a:t>g</a:t>
+              <a:t>ng</a:t>
             </a:r>
             <a:r>
               <a:rPr sz="3200" spc="-160" dirty="0"/>
@@ -1940,7 +1998,6 @@
               <a:rPr spc="-180" dirty="0"/>
               <a:t>Overview</a:t>
             </a:r>
-            <a:endParaRPr spc="-180" dirty="0"/>
           </a:p>
         </p:txBody>
       </p:sp>
@@ -2099,7 +2156,9 @@
           <p:txBody>
             <a:bodyPr wrap="square" lIns="0" tIns="0" rIns="0" bIns="0" rtlCol="0"/>
             <a:lstStyle/>
-            <a:p/>
+            <a:p>
+              <a:endParaRPr/>
+            </a:p>
           </p:txBody>
         </p:sp>
         <p:sp>
@@ -2245,7 +2304,9 @@
           <p:txBody>
             <a:bodyPr wrap="square" lIns="0" tIns="0" rIns="0" bIns="0" rtlCol="0"/>
             <a:lstStyle/>
-            <a:p/>
+            <a:p>
+              <a:endParaRPr/>
+            </a:p>
           </p:txBody>
         </p:sp>
       </p:grpSp>
@@ -2404,7 +2465,9 @@
           <p:txBody>
             <a:bodyPr wrap="square" lIns="0" tIns="0" rIns="0" bIns="0" rtlCol="0"/>
             <a:lstStyle/>
-            <a:p/>
+            <a:p>
+              <a:endParaRPr/>
+            </a:p>
           </p:txBody>
         </p:sp>
         <p:sp>
@@ -2550,7 +2613,9 @@
           <p:txBody>
             <a:bodyPr wrap="square" lIns="0" tIns="0" rIns="0" bIns="0" rtlCol="0"/>
             <a:lstStyle/>
-            <a:p/>
+            <a:p>
+              <a:endParaRPr/>
+            </a:p>
           </p:txBody>
         </p:sp>
       </p:grpSp>
@@ -2709,7 +2774,9 @@
           <p:txBody>
             <a:bodyPr wrap="square" lIns="0" tIns="0" rIns="0" bIns="0" rtlCol="0"/>
             <a:lstStyle/>
-            <a:p/>
+            <a:p>
+              <a:endParaRPr/>
+            </a:p>
           </p:txBody>
         </p:sp>
         <p:sp>
@@ -2855,7 +2922,9 @@
           <p:txBody>
             <a:bodyPr wrap="square" lIns="0" tIns="0" rIns="0" bIns="0" rtlCol="0"/>
             <a:lstStyle/>
-            <a:p/>
+            <a:p>
+              <a:endParaRPr/>
+            </a:p>
           </p:txBody>
         </p:sp>
       </p:grpSp>
@@ -3312,9 +3381,11 @@
         <p:spPr/>
         <p:txBody>
           <a:bodyPr/>
+          <a:lstStyle/>
           <a:p>
             <a:fld id="{B6F15528-21DE-4FAA-801E-634DDDAF4B2B}" type="slidenum">
               <a:rPr/>
+              <a:t>2</a:t>
             </a:fld>
             <a:endParaRPr/>
           </a:p>
@@ -3417,7 +3488,6 @@
               <a:rPr spc="-180" dirty="0"/>
               <a:t>lem</a:t>
             </a:r>
-            <a:endParaRPr spc="-180" dirty="0"/>
           </a:p>
         </p:txBody>
       </p:sp>
@@ -3578,7 +3648,9 @@
           <p:txBody>
             <a:bodyPr wrap="square" lIns="0" tIns="0" rIns="0" bIns="0" rtlCol="0"/>
             <a:lstStyle/>
-            <a:p/>
+            <a:p>
+              <a:endParaRPr/>
+            </a:p>
           </p:txBody>
         </p:sp>
         <p:sp>
@@ -3628,7 +3700,9 @@
           <p:txBody>
             <a:bodyPr wrap="square" lIns="0" tIns="0" rIns="0" bIns="0" rtlCol="0"/>
             <a:lstStyle/>
-            <a:p/>
+            <a:p>
+              <a:endParaRPr/>
+            </a:p>
           </p:txBody>
         </p:sp>
       </p:grpSp>
@@ -3790,7 +3864,9 @@
           <p:txBody>
             <a:bodyPr wrap="square" lIns="0" tIns="0" rIns="0" bIns="0" rtlCol="0"/>
             <a:lstStyle/>
-            <a:p/>
+            <a:p>
+              <a:endParaRPr/>
+            </a:p>
           </p:txBody>
         </p:sp>
         <p:sp>
@@ -3840,7 +3916,9 @@
           <p:txBody>
             <a:bodyPr wrap="square" lIns="0" tIns="0" rIns="0" bIns="0" rtlCol="0"/>
             <a:lstStyle/>
-            <a:p/>
+            <a:p>
+              <a:endParaRPr/>
+            </a:p>
           </p:txBody>
         </p:sp>
         <p:sp>
@@ -3978,7 +4056,9 @@
           <p:txBody>
             <a:bodyPr wrap="square" lIns="0" tIns="0" rIns="0" bIns="0" rtlCol="0"/>
             <a:lstStyle/>
-            <a:p/>
+            <a:p>
+              <a:endParaRPr/>
+            </a:p>
           </p:txBody>
         </p:sp>
         <p:sp>
@@ -4121,7 +4201,9 @@
           <p:txBody>
             <a:bodyPr wrap="square" lIns="0" tIns="0" rIns="0" bIns="0" rtlCol="0"/>
             <a:lstStyle/>
-            <a:p/>
+            <a:p>
+              <a:endParaRPr/>
+            </a:p>
           </p:txBody>
         </p:sp>
       </p:grpSp>
@@ -4203,7 +4285,7 @@
             <p:nvPr/>
           </p:nvPicPr>
           <p:blipFill>
-            <a:blip r:embed="rId1" cstate="print"/>
+            <a:blip r:embed="rId2" cstate="print"/>
             <a:stretch>
               <a:fillRect/>
             </a:stretch>
@@ -4225,7 +4307,7 @@
             <p:nvPr/>
           </p:nvPicPr>
           <p:blipFill>
-            <a:blip r:embed="rId2" cstate="print"/>
+            <a:blip r:embed="rId3" cstate="print"/>
             <a:stretch>
               <a:fillRect/>
             </a:stretch>
@@ -4365,7 +4447,9 @@
           <p:txBody>
             <a:bodyPr wrap="square" lIns="0" tIns="0" rIns="0" bIns="0" rtlCol="0"/>
             <a:lstStyle/>
-            <a:p/>
+            <a:p>
+              <a:endParaRPr/>
+            </a:p>
           </p:txBody>
         </p:sp>
         <p:pic>
@@ -4375,7 +4459,7 @@
             <p:nvPr/>
           </p:nvPicPr>
           <p:blipFill>
-            <a:blip r:embed="rId3" cstate="print"/>
+            <a:blip r:embed="rId4" cstate="print"/>
             <a:stretch>
               <a:fillRect/>
             </a:stretch>
@@ -4397,7 +4481,7 @@
             <p:nvPr/>
           </p:nvPicPr>
           <p:blipFill>
-            <a:blip r:embed="rId4" cstate="print"/>
+            <a:blip r:embed="rId5" cstate="print"/>
             <a:stretch>
               <a:fillRect/>
             </a:stretch>
@@ -4449,7 +4533,9 @@
           <p:txBody>
             <a:bodyPr wrap="square" lIns="0" tIns="0" rIns="0" bIns="0" rtlCol="0"/>
             <a:lstStyle/>
-            <a:p/>
+            <a:p>
+              <a:endParaRPr/>
+            </a:p>
           </p:txBody>
         </p:sp>
         <p:pic>
@@ -4459,7 +4545,7 @@
             <p:nvPr/>
           </p:nvPicPr>
           <p:blipFill>
-            <a:blip r:embed="rId5" cstate="print"/>
+            <a:blip r:embed="rId6" cstate="print"/>
             <a:stretch>
               <a:fillRect/>
             </a:stretch>
@@ -4481,7 +4567,7 @@
             <p:nvPr/>
           </p:nvPicPr>
           <p:blipFill>
-            <a:blip r:embed="rId6" cstate="print"/>
+            <a:blip r:embed="rId7" cstate="print"/>
             <a:stretch>
               <a:fillRect/>
             </a:stretch>
@@ -4503,7 +4589,7 @@
             <p:nvPr/>
           </p:nvPicPr>
           <p:blipFill>
-            <a:blip r:embed="rId7" cstate="print"/>
+            <a:blip r:embed="rId8" cstate="print"/>
             <a:stretch>
               <a:fillRect/>
             </a:stretch>
@@ -4613,7 +4699,9 @@
           <p:txBody>
             <a:bodyPr wrap="square" lIns="0" tIns="0" rIns="0" bIns="0" rtlCol="0"/>
             <a:lstStyle/>
-            <a:p/>
+            <a:p>
+              <a:endParaRPr/>
+            </a:p>
           </p:txBody>
         </p:sp>
       </p:grpSp>
@@ -4723,7 +4811,7 @@
             <p:nvPr/>
           </p:nvPicPr>
           <p:blipFill>
-            <a:blip r:embed="rId8" cstate="print"/>
+            <a:blip r:embed="rId9" cstate="print"/>
             <a:stretch>
               <a:fillRect/>
             </a:stretch>
@@ -4745,7 +4833,7 @@
             <p:nvPr/>
           </p:nvPicPr>
           <p:blipFill>
-            <a:blip r:embed="rId6" cstate="print"/>
+            <a:blip r:embed="rId7" cstate="print"/>
             <a:stretch>
               <a:fillRect/>
             </a:stretch>
@@ -4767,7 +4855,7 @@
             <p:nvPr/>
           </p:nvPicPr>
           <p:blipFill>
-            <a:blip r:embed="rId7" cstate="print"/>
+            <a:blip r:embed="rId8" cstate="print"/>
             <a:stretch>
               <a:fillRect/>
             </a:stretch>
@@ -4877,7 +4965,9 @@
           <p:txBody>
             <a:bodyPr wrap="square" lIns="0" tIns="0" rIns="0" bIns="0" rtlCol="0"/>
             <a:lstStyle/>
-            <a:p/>
+            <a:p>
+              <a:endParaRPr/>
+            </a:p>
           </p:txBody>
         </p:sp>
       </p:grpSp>
@@ -4987,7 +5077,7 @@
             <p:nvPr/>
           </p:nvPicPr>
           <p:blipFill>
-            <a:blip r:embed="rId9" cstate="print"/>
+            <a:blip r:embed="rId10" cstate="print"/>
             <a:stretch>
               <a:fillRect/>
             </a:stretch>
@@ -5009,7 +5099,7 @@
             <p:nvPr/>
           </p:nvPicPr>
           <p:blipFill>
-            <a:blip r:embed="rId6" cstate="print"/>
+            <a:blip r:embed="rId7" cstate="print"/>
             <a:stretch>
               <a:fillRect/>
             </a:stretch>
@@ -5031,7 +5121,7 @@
             <p:nvPr/>
           </p:nvPicPr>
           <p:blipFill>
-            <a:blip r:embed="rId7" cstate="print"/>
+            <a:blip r:embed="rId8" cstate="print"/>
             <a:stretch>
               <a:fillRect/>
             </a:stretch>
@@ -5141,7 +5231,9 @@
           <p:txBody>
             <a:bodyPr wrap="square" lIns="0" tIns="0" rIns="0" bIns="0" rtlCol="0"/>
             <a:lstStyle/>
-            <a:p/>
+            <a:p>
+              <a:endParaRPr/>
+            </a:p>
           </p:txBody>
         </p:sp>
       </p:grpSp>
@@ -5251,7 +5343,7 @@
             <p:nvPr/>
           </p:nvPicPr>
           <p:blipFill>
-            <a:blip r:embed="rId9" cstate="print"/>
+            <a:blip r:embed="rId10" cstate="print"/>
             <a:stretch>
               <a:fillRect/>
             </a:stretch>
@@ -5273,7 +5365,7 @@
             <p:nvPr/>
           </p:nvPicPr>
           <p:blipFill>
-            <a:blip r:embed="rId6" cstate="print"/>
+            <a:blip r:embed="rId7" cstate="print"/>
             <a:stretch>
               <a:fillRect/>
             </a:stretch>
@@ -5295,7 +5387,7 @@
             <p:nvPr/>
           </p:nvPicPr>
           <p:blipFill>
-            <a:blip r:embed="rId7" cstate="print"/>
+            <a:blip r:embed="rId8" cstate="print"/>
             <a:stretch>
               <a:fillRect/>
             </a:stretch>
@@ -5405,7 +5497,9 @@
           <p:txBody>
             <a:bodyPr wrap="square" lIns="0" tIns="0" rIns="0" bIns="0" rtlCol="0"/>
             <a:lstStyle/>
-            <a:p/>
+            <a:p>
+              <a:endParaRPr/>
+            </a:p>
           </p:txBody>
         </p:sp>
         <p:pic>
@@ -5415,7 +5509,7 @@
             <p:nvPr/>
           </p:nvPicPr>
           <p:blipFill>
-            <a:blip r:embed="rId10" cstate="print"/>
+            <a:blip r:embed="rId11" cstate="print"/>
             <a:stretch>
               <a:fillRect/>
             </a:stretch>
@@ -5437,7 +5531,7 @@
             <p:nvPr/>
           </p:nvPicPr>
           <p:blipFill>
-            <a:blip r:embed="rId11" cstate="print"/>
+            <a:blip r:embed="rId12" cstate="print"/>
             <a:stretch>
               <a:fillRect/>
             </a:stretch>
@@ -5459,7 +5553,7 @@
             <p:nvPr/>
           </p:nvPicPr>
           <p:blipFill>
-            <a:blip r:embed="rId12" cstate="print"/>
+            <a:blip r:embed="rId13" cstate="print"/>
             <a:stretch>
               <a:fillRect/>
             </a:stretch>
@@ -5569,7 +5663,9 @@
           <p:txBody>
             <a:bodyPr wrap="square" lIns="0" tIns="0" rIns="0" bIns="0" rtlCol="0"/>
             <a:lstStyle/>
-            <a:p/>
+            <a:p>
+              <a:endParaRPr/>
+            </a:p>
           </p:txBody>
         </p:sp>
       </p:grpSp>
@@ -5679,7 +5775,7 @@
             <p:nvPr/>
           </p:nvPicPr>
           <p:blipFill>
-            <a:blip r:embed="rId13" cstate="print"/>
+            <a:blip r:embed="rId14" cstate="print"/>
             <a:stretch>
               <a:fillRect/>
             </a:stretch>
@@ -5701,7 +5797,7 @@
             <p:nvPr/>
           </p:nvPicPr>
           <p:blipFill>
-            <a:blip r:embed="rId11" cstate="print"/>
+            <a:blip r:embed="rId12" cstate="print"/>
             <a:stretch>
               <a:fillRect/>
             </a:stretch>
@@ -5723,7 +5819,7 @@
             <p:nvPr/>
           </p:nvPicPr>
           <p:blipFill>
-            <a:blip r:embed="rId12" cstate="print"/>
+            <a:blip r:embed="rId13" cstate="print"/>
             <a:stretch>
               <a:fillRect/>
             </a:stretch>
@@ -5833,7 +5929,9 @@
           <p:txBody>
             <a:bodyPr wrap="square" lIns="0" tIns="0" rIns="0" bIns="0" rtlCol="0"/>
             <a:lstStyle/>
-            <a:p/>
+            <a:p>
+              <a:endParaRPr/>
+            </a:p>
           </p:txBody>
         </p:sp>
       </p:grpSp>
@@ -6002,7 +6100,7 @@
             <p:nvPr/>
           </p:nvPicPr>
           <p:blipFill>
-            <a:blip r:embed="rId14" cstate="print"/>
+            <a:blip r:embed="rId15" cstate="print"/>
             <a:stretch>
               <a:fillRect/>
             </a:stretch>
@@ -6024,7 +6122,7 @@
             <p:nvPr/>
           </p:nvPicPr>
           <p:blipFill>
-            <a:blip r:embed="rId15" cstate="print"/>
+            <a:blip r:embed="rId16" cstate="print"/>
             <a:stretch>
               <a:fillRect/>
             </a:stretch>
@@ -6046,7 +6144,7 @@
             <p:nvPr/>
           </p:nvPicPr>
           <p:blipFill>
-            <a:blip r:embed="rId16" cstate="print"/>
+            <a:blip r:embed="rId17" cstate="print"/>
             <a:stretch>
               <a:fillRect/>
             </a:stretch>
@@ -6156,7 +6254,9 @@
           <p:txBody>
             <a:bodyPr wrap="square" lIns="0" tIns="0" rIns="0" bIns="0" rtlCol="0"/>
             <a:lstStyle/>
-            <a:p/>
+            <a:p>
+              <a:endParaRPr/>
+            </a:p>
           </p:txBody>
         </p:sp>
       </p:grpSp>
@@ -6354,7 +6454,6 @@
               <a:rPr spc="-200" dirty="0"/>
               <a:t>!</a:t>
             </a:r>
-            <a:endParaRPr spc="-200" dirty="0"/>
           </a:p>
           <a:p>
             <a:pPr marL="355600" indent="-342900">
@@ -6415,35 +6514,105 @@
                 <a:latin typeface="Tahoma" panose="020B0604030504040204"/>
                 <a:cs typeface="Tahoma" panose="020B0604030504040204"/>
               </a:rPr>
+              <a:t>rv</a:t>
+            </a:r>
+            <a:r>
+              <a:rPr spc="-185" dirty="0">
+                <a:latin typeface="Tahoma" panose="020B0604030504040204"/>
+                <a:cs typeface="Tahoma" panose="020B0604030504040204"/>
+              </a:rPr>
+              <a:t>e</a:t>
+            </a:r>
+            <a:r>
+              <a:rPr spc="-130" dirty="0">
+                <a:latin typeface="Tahoma" panose="020B0604030504040204"/>
+                <a:cs typeface="Tahoma" panose="020B0604030504040204"/>
+              </a:rPr>
               <a:t>r</a:t>
             </a:r>
             <a:r>
-              <a:rPr spc="-140" dirty="0">
-                <a:latin typeface="Tahoma" panose="020B0604030504040204"/>
-                <a:cs typeface="Tahoma" panose="020B0604030504040204"/>
-              </a:rPr>
-              <a:t>v</a:t>
-            </a:r>
-            <a:r>
-              <a:rPr spc="-185" dirty="0">
+              <a:rPr spc="-175" dirty="0">
+                <a:latin typeface="Tahoma" panose="020B0604030504040204"/>
+                <a:cs typeface="Tahoma" panose="020B0604030504040204"/>
+              </a:rPr>
+              <a:t> </a:t>
+            </a:r>
+            <a:r>
+              <a:rPr spc="-100" dirty="0">
+                <a:latin typeface="Tahoma" panose="020B0604030504040204"/>
+                <a:cs typeface="Tahoma" panose="020B0604030504040204"/>
+              </a:rPr>
+              <a:t>d</a:t>
+            </a:r>
+            <a:r>
+              <a:rPr spc="-165" dirty="0">
+                <a:latin typeface="Tahoma" panose="020B0604030504040204"/>
+                <a:cs typeface="Tahoma" panose="020B0604030504040204"/>
+              </a:rPr>
+              <a:t>oe</a:t>
+            </a:r>
+            <a:r>
+              <a:rPr spc="-135" dirty="0">
+                <a:latin typeface="Tahoma" panose="020B0604030504040204"/>
+                <a:cs typeface="Tahoma" panose="020B0604030504040204"/>
+              </a:rPr>
+              <a:t>s</a:t>
+            </a:r>
+            <a:r>
+              <a:rPr spc="-165" dirty="0">
+                <a:latin typeface="Tahoma" panose="020B0604030504040204"/>
+                <a:cs typeface="Tahoma" panose="020B0604030504040204"/>
+              </a:rPr>
+              <a:t> </a:t>
+            </a:r>
+            <a:r>
+              <a:rPr spc="-254" dirty="0">
+                <a:latin typeface="Tahoma" panose="020B0604030504040204"/>
+                <a:cs typeface="Tahoma" panose="020B0604030504040204"/>
+              </a:rPr>
+              <a:t>:</a:t>
+            </a:r>
+            <a:r>
+              <a:rPr spc="-175" dirty="0">
+                <a:latin typeface="Tahoma" panose="020B0604030504040204"/>
+                <a:cs typeface="Tahoma" panose="020B0604030504040204"/>
+              </a:rPr>
+              <a:t> </a:t>
+            </a:r>
+            <a:r>
+              <a:rPr spc="-170" dirty="0">
+                <a:latin typeface="Tahoma" panose="020B0604030504040204"/>
+                <a:cs typeface="Tahoma" panose="020B0604030504040204"/>
+              </a:rPr>
+              <a:t>(</a:t>
+            </a:r>
+            <a:r>
+              <a:rPr spc="-229" dirty="0">
+                <a:latin typeface="Tahoma" panose="020B0604030504040204"/>
+                <a:cs typeface="Tahoma" panose="020B0604030504040204"/>
+              </a:rPr>
+              <a:t>p</a:t>
+            </a:r>
+            <a:r>
+              <a:rPr spc="-195" dirty="0">
+                <a:latin typeface="Tahoma" panose="020B0604030504040204"/>
+                <a:cs typeface="Tahoma" panose="020B0604030504040204"/>
+              </a:rPr>
+              <a:t>s</a:t>
+            </a:r>
+            <a:r>
+              <a:rPr spc="-160" dirty="0">
                 <a:latin typeface="Tahoma" panose="020B0604030504040204"/>
                 <a:cs typeface="Tahoma" panose="020B0604030504040204"/>
               </a:rPr>
               <a:t>e</a:t>
             </a:r>
             <a:r>
-              <a:rPr spc="-130" dirty="0">
-                <a:latin typeface="Tahoma" panose="020B0604030504040204"/>
-                <a:cs typeface="Tahoma" panose="020B0604030504040204"/>
-              </a:rPr>
-              <a:t>r</a:t>
-            </a:r>
-            <a:r>
-              <a:rPr spc="-175" dirty="0">
-                <a:latin typeface="Tahoma" panose="020B0604030504040204"/>
-                <a:cs typeface="Tahoma" panose="020B0604030504040204"/>
-              </a:rPr>
-              <a:t> </a:t>
+              <a:rPr spc="-145" dirty="0">
+                <a:latin typeface="Tahoma" panose="020B0604030504040204"/>
+                <a:cs typeface="Tahoma" panose="020B0604030504040204"/>
+              </a:rPr>
+              <a:t>u</a:t>
             </a:r>
             <a:r>
               <a:rPr spc="-100" dirty="0">
@@ -6453,83 +6622,6 @@
               <a:t>d</a:t>
             </a:r>
             <a:r>
-              <a:rPr spc="-165" dirty="0">
-                <a:latin typeface="Tahoma" panose="020B0604030504040204"/>
-                <a:cs typeface="Tahoma" panose="020B0604030504040204"/>
-              </a:rPr>
-              <a:t>oe</a:t>
-            </a:r>
-            <a:r>
-              <a:rPr spc="-135" dirty="0">
-                <a:latin typeface="Tahoma" panose="020B0604030504040204"/>
-                <a:cs typeface="Tahoma" panose="020B0604030504040204"/>
-              </a:rPr>
-              <a:t>s</a:t>
-            </a:r>
-            <a:r>
-              <a:rPr spc="-165" dirty="0">
-                <a:latin typeface="Tahoma" panose="020B0604030504040204"/>
-                <a:cs typeface="Tahoma" panose="020B0604030504040204"/>
-              </a:rPr>
-              <a:t> </a:t>
-            </a:r>
-            <a:r>
-              <a:rPr spc="-254" dirty="0">
-                <a:latin typeface="Tahoma" panose="020B0604030504040204"/>
-                <a:cs typeface="Tahoma" panose="020B0604030504040204"/>
-              </a:rPr>
-              <a:t>:</a:t>
-            </a:r>
-            <a:r>
-              <a:rPr spc="-175" dirty="0">
-                <a:latin typeface="Tahoma" panose="020B0604030504040204"/>
-                <a:cs typeface="Tahoma" panose="020B0604030504040204"/>
-              </a:rPr>
-              <a:t> </a:t>
-            </a:r>
-            <a:r>
-              <a:rPr spc="-170" dirty="0">
-                <a:latin typeface="Tahoma" panose="020B0604030504040204"/>
-                <a:cs typeface="Tahoma" panose="020B0604030504040204"/>
-              </a:rPr>
-              <a:t>(</a:t>
-            </a:r>
-            <a:r>
-              <a:rPr spc="-229" dirty="0">
-                <a:latin typeface="Tahoma" panose="020B0604030504040204"/>
-                <a:cs typeface="Tahoma" panose="020B0604030504040204"/>
-              </a:rPr>
-              <a:t>p</a:t>
-            </a:r>
-            <a:r>
-              <a:rPr spc="-195" dirty="0">
-                <a:latin typeface="Tahoma" panose="020B0604030504040204"/>
-                <a:cs typeface="Tahoma" panose="020B0604030504040204"/>
-              </a:rPr>
-              <a:t>s</a:t>
-            </a:r>
-            <a:r>
-              <a:rPr spc="-160" dirty="0">
-                <a:latin typeface="Tahoma" panose="020B0604030504040204"/>
-                <a:cs typeface="Tahoma" panose="020B0604030504040204"/>
-              </a:rPr>
-              <a:t>e</a:t>
-            </a:r>
-            <a:r>
-              <a:rPr spc="-145" dirty="0">
-                <a:latin typeface="Tahoma" panose="020B0604030504040204"/>
-                <a:cs typeface="Tahoma" panose="020B0604030504040204"/>
-              </a:rPr>
-              <a:t>u</a:t>
-            </a:r>
-            <a:r>
-              <a:rPr spc="-100" dirty="0">
-                <a:latin typeface="Tahoma" panose="020B0604030504040204"/>
-                <a:cs typeface="Tahoma" panose="020B0604030504040204"/>
-              </a:rPr>
-              <a:t>d</a:t>
-            </a:r>
-            <a:r>
               <a:rPr spc="-110" dirty="0">
                 <a:latin typeface="Tahoma" panose="020B0604030504040204"/>
                 <a:cs typeface="Tahoma" panose="020B0604030504040204"/>
@@ -6543,10 +6635,6 @@
               </a:rPr>
               <a:t>)</a:t>
             </a:r>
-            <a:endParaRPr spc="-305" dirty="0">
-              <a:latin typeface="Tahoma" panose="020B0604030504040204"/>
-              <a:cs typeface="Tahoma" panose="020B0604030504040204"/>
-            </a:endParaRPr>
           </a:p>
           <a:p>
             <a:pPr marL="768350" marR="3641090" indent="-375285">
@@ -6812,15 +6900,7 @@
                   <a:srgbClr val="002060"/>
                 </a:solidFill>
               </a:rPr>
-              <a:t>D</a:t>
-            </a:r>
-            <a:r>
-              <a:rPr sz="1800" spc="-225" dirty="0">
-                <a:solidFill>
-                  <a:srgbClr val="002060"/>
-                </a:solidFill>
-              </a:rPr>
-              <a:t>o</a:t>
+              <a:t>Do</a:t>
             </a:r>
             <a:r>
               <a:rPr sz="1800" spc="-170" dirty="0">
@@ -6943,9 +7023,11 @@
         <p:spPr/>
         <p:txBody>
           <a:bodyPr/>
+          <a:lstStyle/>
           <a:p>
             <a:fld id="{B6F15528-21DE-4FAA-801E-634DDDAF4B2B}" type="slidenum">
               <a:rPr/>
+              <a:t>3</a:t>
             </a:fld>
             <a:endParaRPr/>
           </a:p>
@@ -7060,7 +7142,6 @@
               <a:rPr spc="-155" dirty="0"/>
               <a:t>n</a:t>
             </a:r>
-            <a:endParaRPr spc="-155" dirty="0"/>
           </a:p>
         </p:txBody>
       </p:sp>
@@ -7083,8 +7164,20 @@
                 <a:tableStyleId>{2D5ABB26-0587-4C30-8999-92F81FD0307C}</a:tableStyleId>
               </a:tblPr>
               <a:tblGrid>
-                <a:gridCol w="1790700"/>
-                <a:gridCol w="1790700"/>
+                <a:gridCol w="1790700">
+                  <a:extLst>
+                    <a:ext uri="{9D8B030D-6E8A-4147-A177-3AD203B41FA5}">
+                      <a16:colId xmlns:a16="http://schemas.microsoft.com/office/drawing/2014/main" val="20000"/>
+                    </a:ext>
+                  </a:extLst>
+                </a:gridCol>
+                <a:gridCol w="1790700">
+                  <a:extLst>
+                    <a:ext uri="{9D8B030D-6E8A-4147-A177-3AD203B41FA5}">
+                      <a16:colId xmlns:a16="http://schemas.microsoft.com/office/drawing/2014/main" val="20001"/>
+                    </a:ext>
+                  </a:extLst>
+                </a:gridCol>
               </a:tblGrid>
               <a:tr h="365760">
                 <a:tc>
@@ -7177,17 +7270,7 @@
                           <a:latin typeface="Tahoma" panose="020B0604030504040204"/>
                           <a:cs typeface="Tahoma" panose="020B0604030504040204"/>
                         </a:rPr>
-                        <a:t>o</a:t>
-                      </a:r>
-                      <a:r>
-                        <a:rPr sz="1800" b="1" dirty="0">
-                          <a:solidFill>
-                            <a:srgbClr val="FFFFFF"/>
-                          </a:solidFill>
-                          <a:latin typeface="Tahoma" panose="020B0604030504040204"/>
-                          <a:cs typeface="Tahoma" panose="020B0604030504040204"/>
-                        </a:rPr>
-                        <a:t>c</a:t>
+                        <a:t>oc</a:t>
                       </a:r>
                       <a:r>
                         <a:rPr sz="1800" b="1" spc="-160" dirty="0">
@@ -7207,17 +7290,7 @@
                           <a:latin typeface="Tahoma" panose="020B0604030504040204"/>
                           <a:cs typeface="Tahoma" panose="020B0604030504040204"/>
                         </a:rPr>
-                        <a:t>P</a:t>
-                      </a:r>
-                      <a:r>
-                        <a:rPr sz="1800" b="1" dirty="0">
-                          <a:solidFill>
-                            <a:srgbClr val="FFFFFF"/>
-                          </a:solidFill>
-                          <a:latin typeface="Tahoma" panose="020B0604030504040204"/>
-                          <a:cs typeface="Tahoma" panose="020B0604030504040204"/>
-                        </a:rPr>
-                        <a:t>o</a:t>
+                        <a:t>Po</a:t>
                       </a:r>
                       <a:r>
                         <a:rPr sz="1800" b="1" spc="-10" dirty="0">
@@ -7237,17 +7310,7 @@
                           <a:latin typeface="Tahoma" panose="020B0604030504040204"/>
                           <a:cs typeface="Tahoma" panose="020B0604030504040204"/>
                         </a:rPr>
-                        <a:t>n</a:t>
-                      </a:r>
-                      <a:r>
-                        <a:rPr sz="1800" b="1" dirty="0">
-                          <a:solidFill>
-                            <a:srgbClr val="FFFFFF"/>
-                          </a:solidFill>
-                          <a:latin typeface="Tahoma" panose="020B0604030504040204"/>
-                          <a:cs typeface="Tahoma" panose="020B0604030504040204"/>
-                        </a:rPr>
-                        <a:t>t</a:t>
+                        <a:t>nt</a:t>
                       </a:r>
                       <a:r>
                         <a:rPr sz="1800" b="1" spc="-10" dirty="0">
@@ -7295,6 +7358,11 @@
                     </a:solidFill>
                   </a:tcPr>
                 </a:tc>
+                <a:extLst>
+                  <a:ext uri="{0D108BD9-81ED-4DB2-BD59-A6C34878D82A}">
+                    <a16:rowId xmlns:a16="http://schemas.microsoft.com/office/drawing/2014/main" val="10000"/>
+                  </a:ext>
+                </a:extLst>
               </a:tr>
               <a:tr h="365760">
                 <a:tc>
@@ -7458,6 +7526,11 @@
                     </a:solidFill>
                   </a:tcPr>
                 </a:tc>
+                <a:extLst>
+                  <a:ext uri="{0D108BD9-81ED-4DB2-BD59-A6C34878D82A}">
+                    <a16:rowId xmlns:a16="http://schemas.microsoft.com/office/drawing/2014/main" val="10001"/>
+                  </a:ext>
+                </a:extLst>
               </a:tr>
               <a:tr h="365759">
                 <a:tc>
@@ -7572,6 +7645,11 @@
                     </a:solidFill>
                   </a:tcPr>
                 </a:tc>
+                <a:extLst>
+                  <a:ext uri="{0D108BD9-81ED-4DB2-BD59-A6C34878D82A}">
+                    <a16:rowId xmlns:a16="http://schemas.microsoft.com/office/drawing/2014/main" val="10002"/>
+                  </a:ext>
+                </a:extLst>
               </a:tr>
             </a:tbl>
           </a:graphicData>
@@ -7598,7 +7676,7 @@
             <p:nvPr/>
           </p:nvPicPr>
           <p:blipFill>
-            <a:blip r:embed="rId1" cstate="print"/>
+            <a:blip r:embed="rId2" cstate="print"/>
             <a:stretch>
               <a:fillRect/>
             </a:stretch>
@@ -7620,7 +7698,7 @@
             <p:nvPr/>
           </p:nvPicPr>
           <p:blipFill>
-            <a:blip r:embed="rId2" cstate="print"/>
+            <a:blip r:embed="rId3" cstate="print"/>
             <a:stretch>
               <a:fillRect/>
             </a:stretch>
@@ -7760,7 +7838,9 @@
           <p:txBody>
             <a:bodyPr wrap="square" lIns="0" tIns="0" rIns="0" bIns="0" rtlCol="0"/>
             <a:lstStyle/>
-            <a:p/>
+            <a:p>
+              <a:endParaRPr/>
+            </a:p>
           </p:txBody>
         </p:sp>
         <p:pic>
@@ -7770,7 +7850,7 @@
             <p:nvPr/>
           </p:nvPicPr>
           <p:blipFill>
-            <a:blip r:embed="rId3" cstate="print"/>
+            <a:blip r:embed="rId4" cstate="print"/>
             <a:stretch>
               <a:fillRect/>
             </a:stretch>
@@ -7792,7 +7872,7 @@
             <p:nvPr/>
           </p:nvPicPr>
           <p:blipFill>
-            <a:blip r:embed="rId4" cstate="print"/>
+            <a:blip r:embed="rId5" cstate="print"/>
             <a:stretch>
               <a:fillRect/>
             </a:stretch>
@@ -7844,7 +7924,9 @@
           <p:txBody>
             <a:bodyPr wrap="square" lIns="0" tIns="0" rIns="0" bIns="0" rtlCol="0"/>
             <a:lstStyle/>
-            <a:p/>
+            <a:p>
+              <a:endParaRPr/>
+            </a:p>
           </p:txBody>
         </p:sp>
         <p:sp>
@@ -7940,7 +8022,9 @@
           <p:txBody>
             <a:bodyPr wrap="square" lIns="0" tIns="0" rIns="0" bIns="0" rtlCol="0"/>
             <a:lstStyle/>
-            <a:p/>
+            <a:p>
+              <a:endParaRPr/>
+            </a:p>
           </p:txBody>
         </p:sp>
         <p:sp>
@@ -8038,7 +8122,9 @@
           <p:txBody>
             <a:bodyPr wrap="square" lIns="0" tIns="0" rIns="0" bIns="0" rtlCol="0"/>
             <a:lstStyle/>
-            <a:p/>
+            <a:p>
+              <a:endParaRPr/>
+            </a:p>
           </p:txBody>
         </p:sp>
       </p:grpSp>
@@ -8234,7 +8320,9 @@
           <p:txBody>
             <a:bodyPr wrap="square" lIns="0" tIns="0" rIns="0" bIns="0" rtlCol="0"/>
             <a:lstStyle/>
-            <a:p/>
+            <a:p>
+              <a:endParaRPr/>
+            </a:p>
           </p:txBody>
         </p:sp>
         <p:sp>
@@ -8332,7 +8420,9 @@
           <p:txBody>
             <a:bodyPr wrap="square" lIns="0" tIns="0" rIns="0" bIns="0" rtlCol="0"/>
             <a:lstStyle/>
-            <a:p/>
+            <a:p>
+              <a:endParaRPr/>
+            </a:p>
           </p:txBody>
         </p:sp>
       </p:grpSp>
@@ -8528,7 +8618,9 @@
           <p:txBody>
             <a:bodyPr wrap="square" lIns="0" tIns="0" rIns="0" bIns="0" rtlCol="0"/>
             <a:lstStyle/>
-            <a:p/>
+            <a:p>
+              <a:endParaRPr/>
+            </a:p>
           </p:txBody>
         </p:sp>
         <p:sp>
@@ -8626,7 +8718,9 @@
           <p:txBody>
             <a:bodyPr wrap="square" lIns="0" tIns="0" rIns="0" bIns="0" rtlCol="0"/>
             <a:lstStyle/>
-            <a:p/>
+            <a:p>
+              <a:endParaRPr/>
+            </a:p>
           </p:txBody>
         </p:sp>
       </p:grpSp>
@@ -8822,7 +8916,9 @@
           <p:txBody>
             <a:bodyPr wrap="square" lIns="0" tIns="0" rIns="0" bIns="0" rtlCol="0"/>
             <a:lstStyle/>
-            <a:p/>
+            <a:p>
+              <a:endParaRPr/>
+            </a:p>
           </p:txBody>
         </p:sp>
         <p:sp>
@@ -8920,7 +9016,9 @@
           <p:txBody>
             <a:bodyPr wrap="square" lIns="0" tIns="0" rIns="0" bIns="0" rtlCol="0"/>
             <a:lstStyle/>
-            <a:p/>
+            <a:p>
+              <a:endParaRPr/>
+            </a:p>
           </p:txBody>
         </p:sp>
         <p:pic>
@@ -8930,7 +9028,7 @@
             <p:nvPr/>
           </p:nvPicPr>
           <p:blipFill>
-            <a:blip r:embed="rId5" cstate="print"/>
+            <a:blip r:embed="rId6" cstate="print"/>
             <a:stretch>
               <a:fillRect/>
             </a:stretch>
@@ -8952,7 +9050,7 @@
             <p:nvPr/>
           </p:nvPicPr>
           <p:blipFill>
-            <a:blip r:embed="rId6" cstate="print"/>
+            <a:blip r:embed="rId7" cstate="print"/>
             <a:stretch>
               <a:fillRect/>
             </a:stretch>
@@ -8974,7 +9072,7 @@
             <p:nvPr/>
           </p:nvPicPr>
           <p:blipFill>
-            <a:blip r:embed="rId7" cstate="print"/>
+            <a:blip r:embed="rId8" cstate="print"/>
             <a:stretch>
               <a:fillRect/>
             </a:stretch>
@@ -9084,7 +9182,9 @@
           <p:txBody>
             <a:bodyPr wrap="square" lIns="0" tIns="0" rIns="0" bIns="0" rtlCol="0"/>
             <a:lstStyle/>
-            <a:p/>
+            <a:p>
+              <a:endParaRPr/>
+            </a:p>
           </p:txBody>
         </p:sp>
       </p:grpSp>
@@ -9194,7 +9294,7 @@
             <p:nvPr/>
           </p:nvPicPr>
           <p:blipFill>
-            <a:blip r:embed="rId5" cstate="print"/>
+            <a:blip r:embed="rId6" cstate="print"/>
             <a:stretch>
               <a:fillRect/>
             </a:stretch>
@@ -9216,7 +9316,7 @@
             <p:nvPr/>
           </p:nvPicPr>
           <p:blipFill>
-            <a:blip r:embed="rId8" cstate="print"/>
+            <a:blip r:embed="rId9" cstate="print"/>
             <a:stretch>
               <a:fillRect/>
             </a:stretch>
@@ -9238,7 +9338,7 @@
             <p:nvPr/>
           </p:nvPicPr>
           <p:blipFill>
-            <a:blip r:embed="rId9" cstate="print"/>
+            <a:blip r:embed="rId10" cstate="print"/>
             <a:stretch>
               <a:fillRect/>
             </a:stretch>
@@ -9348,7 +9448,9 @@
           <p:txBody>
             <a:bodyPr wrap="square" lIns="0" tIns="0" rIns="0" bIns="0" rtlCol="0"/>
             <a:lstStyle/>
-            <a:p/>
+            <a:p>
+              <a:endParaRPr/>
+            </a:p>
           </p:txBody>
         </p:sp>
       </p:grpSp>
@@ -9517,7 +9619,7 @@
             <p:nvPr/>
           </p:nvPicPr>
           <p:blipFill>
-            <a:blip r:embed="rId10" cstate="print"/>
+            <a:blip r:embed="rId11" cstate="print"/>
             <a:stretch>
               <a:fillRect/>
             </a:stretch>
@@ -9539,7 +9641,7 @@
             <p:nvPr/>
           </p:nvPicPr>
           <p:blipFill>
-            <a:blip r:embed="rId11" cstate="print"/>
+            <a:blip r:embed="rId12" cstate="print"/>
             <a:stretch>
               <a:fillRect/>
             </a:stretch>
@@ -9561,7 +9663,7 @@
             <p:nvPr/>
           </p:nvPicPr>
           <p:blipFill>
-            <a:blip r:embed="rId12" cstate="print"/>
+            <a:blip r:embed="rId13" cstate="print"/>
             <a:stretch>
               <a:fillRect/>
             </a:stretch>
@@ -9671,7 +9773,9 @@
           <p:txBody>
             <a:bodyPr wrap="square" lIns="0" tIns="0" rIns="0" bIns="0" rtlCol="0"/>
             <a:lstStyle/>
-            <a:p/>
+            <a:p>
+              <a:endParaRPr/>
+            </a:p>
           </p:txBody>
         </p:sp>
       </p:grpSp>
@@ -9781,7 +9885,7 @@
             <p:nvPr/>
           </p:nvPicPr>
           <p:blipFill>
-            <a:blip r:embed="rId13" cstate="print"/>
+            <a:blip r:embed="rId14" cstate="print"/>
             <a:stretch>
               <a:fillRect/>
             </a:stretch>
@@ -10049,7 +10153,9 @@
           <p:txBody>
             <a:bodyPr wrap="square" lIns="0" tIns="0" rIns="0" bIns="0" rtlCol="0"/>
             <a:lstStyle/>
-            <a:p/>
+            <a:p>
+              <a:endParaRPr/>
+            </a:p>
           </p:txBody>
         </p:sp>
       </p:grpSp>
@@ -10095,7 +10201,9 @@
         <p:txBody>
           <a:bodyPr wrap="square" lIns="0" tIns="0" rIns="0" bIns="0" rtlCol="0"/>
           <a:lstStyle/>
-          <a:p/>
+          <a:p>
+            <a:endParaRPr/>
+          </a:p>
         </p:txBody>
       </p:sp>
       <p:sp>
@@ -10135,17 +10243,7 @@
                 <a:latin typeface="Arial" panose="020B0604020202020204"/>
                 <a:cs typeface="Arial" panose="020B0604020202020204"/>
               </a:rPr>
-              <a:t>D</a:t>
-            </a:r>
-            <a:r>
-              <a:rPr sz="1800" b="1" spc="-225" dirty="0">
-                <a:solidFill>
-                  <a:srgbClr val="002060"/>
-                </a:solidFill>
-                <a:latin typeface="Arial" panose="020B0604020202020204"/>
-                <a:cs typeface="Arial" panose="020B0604020202020204"/>
-              </a:rPr>
-              <a:t>o</a:t>
+              <a:t>Do</a:t>
             </a:r>
             <a:r>
               <a:rPr sz="1800" b="1" spc="-170" dirty="0">
@@ -10431,7 +10529,17 @@
                 <a:latin typeface="Arial" panose="020B0604020202020204"/>
                 <a:cs typeface="Arial" panose="020B0604020202020204"/>
               </a:rPr>
-              <a:t> </a:t>
+              <a:t> ‘</a:t>
+            </a:r>
+            <a:r>
+              <a:rPr sz="1800" b="1" spc="-215" dirty="0">
+                <a:solidFill>
+                  <a:srgbClr val="002060"/>
+                </a:solidFill>
+                <a:latin typeface="Arial" panose="020B0604020202020204"/>
+                <a:cs typeface="Arial" panose="020B0604020202020204"/>
+              </a:rPr>
+              <a:t>x</a:t>
             </a:r>
             <a:r>
               <a:rPr sz="1800" b="1" spc="-180" dirty="0">
@@ -10441,7 +10549,37 @@
                 <a:latin typeface="Arial" panose="020B0604020202020204"/>
                 <a:cs typeface="Arial" panose="020B0604020202020204"/>
               </a:rPr>
-              <a:t>‘</a:t>
+              <a:t>’</a:t>
+            </a:r>
+            <a:r>
+              <a:rPr sz="1800" b="1" spc="-110" dirty="0">
+                <a:solidFill>
+                  <a:srgbClr val="002060"/>
+                </a:solidFill>
+                <a:latin typeface="Arial" panose="020B0604020202020204"/>
+                <a:cs typeface="Arial" panose="020B0604020202020204"/>
+              </a:rPr>
+              <a:t>,</a:t>
+            </a:r>
+            <a:r>
+              <a:rPr sz="1800" b="1" spc="-175" dirty="0">
+                <a:solidFill>
+                  <a:srgbClr val="002060"/>
+                </a:solidFill>
+                <a:latin typeface="Arial" panose="020B0604020202020204"/>
+                <a:cs typeface="Arial" panose="020B0604020202020204"/>
+              </a:rPr>
+              <a:t> </a:t>
+            </a:r>
+            <a:r>
+              <a:rPr sz="1800" b="1" spc="-180" dirty="0">
+                <a:solidFill>
+                  <a:srgbClr val="002060"/>
+                </a:solidFill>
+                <a:latin typeface="Arial" panose="020B0604020202020204"/>
+                <a:cs typeface="Arial" panose="020B0604020202020204"/>
+              </a:rPr>
+              <a:t>c</a:t>
             </a:r>
             <a:r>
               <a:rPr sz="1800" b="1" spc="-215" dirty="0">
@@ -10451,7 +10589,17 @@
                 <a:latin typeface="Arial" panose="020B0604020202020204"/>
                 <a:cs typeface="Arial" panose="020B0604020202020204"/>
               </a:rPr>
-              <a:t>x</a:t>
+              <a:t>o</a:t>
+            </a:r>
+            <a:r>
+              <a:rPr sz="1800" b="1" spc="-135" dirty="0">
+                <a:solidFill>
+                  <a:srgbClr val="002060"/>
+                </a:solidFill>
+                <a:latin typeface="Arial" panose="020B0604020202020204"/>
+                <a:cs typeface="Arial" panose="020B0604020202020204"/>
+              </a:rPr>
+              <a:t>lle</a:t>
             </a:r>
             <a:r>
               <a:rPr sz="1800" b="1" spc="-180" dirty="0">
@@ -10461,7 +10609,17 @@
                 <a:latin typeface="Arial" panose="020B0604020202020204"/>
                 <a:cs typeface="Arial" panose="020B0604020202020204"/>
               </a:rPr>
-              <a:t>’</a:t>
+              <a:t>c</a:t>
+            </a:r>
+            <a:r>
+              <a:rPr sz="1800" b="1" spc="235" dirty="0">
+                <a:solidFill>
+                  <a:srgbClr val="002060"/>
+                </a:solidFill>
+                <a:latin typeface="Arial" panose="020B0604020202020204"/>
+                <a:cs typeface="Arial" panose="020B0604020202020204"/>
+              </a:rPr>
+              <a:t>t</a:t>
             </a:r>
             <a:r>
               <a:rPr sz="1800" b="1" spc="-110" dirty="0">
@@ -10471,17 +10629,27 @@
                 <a:latin typeface="Arial" panose="020B0604020202020204"/>
                 <a:cs typeface="Arial" panose="020B0604020202020204"/>
               </a:rPr>
-              <a:t>,</a:t>
-            </a:r>
-            <a:r>
-              <a:rPr sz="1800" b="1" spc="-175" dirty="0">
+              <a:t>i</a:t>
+            </a:r>
+            <a:r>
+              <a:rPr sz="1800" b="1" spc="-225" dirty="0">
                 <a:solidFill>
                   <a:srgbClr val="002060"/>
                 </a:solidFill>
                 <a:latin typeface="Arial" panose="020B0604020202020204"/>
                 <a:cs typeface="Arial" panose="020B0604020202020204"/>
               </a:rPr>
-              <a:t> </a:t>
+              <a:t>o</a:t>
+            </a:r>
+            <a:r>
+              <a:rPr sz="1800" b="1" spc="-250" dirty="0">
+                <a:solidFill>
+                  <a:srgbClr val="002060"/>
+                </a:solidFill>
+                <a:latin typeface="Arial" panose="020B0604020202020204"/>
+                <a:cs typeface="Arial" panose="020B0604020202020204"/>
+              </a:rPr>
+              <a:t>n</a:t>
             </a:r>
             <a:r>
               <a:rPr sz="1800" b="1" spc="-180" dirty="0">
@@ -10491,97 +10659,7 @@
                 <a:latin typeface="Arial" panose="020B0604020202020204"/>
                 <a:cs typeface="Arial" panose="020B0604020202020204"/>
               </a:rPr>
-              <a:t>c</a:t>
-            </a:r>
-            <a:r>
-              <a:rPr sz="1800" b="1" spc="-215" dirty="0">
-                <a:solidFill>
-                  <a:srgbClr val="002060"/>
-                </a:solidFill>
-                <a:latin typeface="Arial" panose="020B0604020202020204"/>
-                <a:cs typeface="Arial" panose="020B0604020202020204"/>
-              </a:rPr>
-              <a:t>o</a:t>
-            </a:r>
-            <a:r>
-              <a:rPr sz="1800" b="1" spc="-135" dirty="0">
-                <a:solidFill>
-                  <a:srgbClr val="002060"/>
-                </a:solidFill>
-                <a:latin typeface="Arial" panose="020B0604020202020204"/>
-                <a:cs typeface="Arial" panose="020B0604020202020204"/>
-              </a:rPr>
-              <a:t>lle</a:t>
-            </a:r>
-            <a:r>
-              <a:rPr sz="1800" b="1" spc="-180" dirty="0">
-                <a:solidFill>
-                  <a:srgbClr val="002060"/>
-                </a:solidFill>
-                <a:latin typeface="Arial" panose="020B0604020202020204"/>
-                <a:cs typeface="Arial" panose="020B0604020202020204"/>
-              </a:rPr>
-              <a:t>c</a:t>
-            </a:r>
-            <a:r>
-              <a:rPr sz="1800" b="1" spc="235" dirty="0">
-                <a:solidFill>
-                  <a:srgbClr val="002060"/>
-                </a:solidFill>
-                <a:latin typeface="Arial" panose="020B0604020202020204"/>
-                <a:cs typeface="Arial" panose="020B0604020202020204"/>
-              </a:rPr>
-              <a:t>t</a:t>
-            </a:r>
-            <a:r>
-              <a:rPr sz="1800" b="1" spc="-110" dirty="0">
-                <a:solidFill>
-                  <a:srgbClr val="002060"/>
-                </a:solidFill>
-                <a:latin typeface="Arial" panose="020B0604020202020204"/>
-                <a:cs typeface="Arial" panose="020B0604020202020204"/>
-              </a:rPr>
-              <a:t>i</a:t>
-            </a:r>
-            <a:r>
-              <a:rPr sz="1800" b="1" spc="-225" dirty="0">
-                <a:solidFill>
-                  <a:srgbClr val="002060"/>
-                </a:solidFill>
-                <a:latin typeface="Arial" panose="020B0604020202020204"/>
-                <a:cs typeface="Arial" panose="020B0604020202020204"/>
-              </a:rPr>
-              <a:t>o</a:t>
-            </a:r>
-            <a:r>
-              <a:rPr sz="1800" b="1" spc="-250" dirty="0">
-                <a:solidFill>
-                  <a:srgbClr val="002060"/>
-                </a:solidFill>
-                <a:latin typeface="Arial" panose="020B0604020202020204"/>
-                <a:cs typeface="Arial" panose="020B0604020202020204"/>
-              </a:rPr>
-              <a:t>n</a:t>
-            </a:r>
-            <a:r>
-              <a:rPr sz="1800" b="1" spc="-180" dirty="0">
-                <a:solidFill>
-                  <a:srgbClr val="002060"/>
-                </a:solidFill>
-                <a:latin typeface="Arial" panose="020B0604020202020204"/>
-                <a:cs typeface="Arial" panose="020B0604020202020204"/>
-              </a:rPr>
-              <a:t> </a:t>
-            </a:r>
-            <a:r>
-              <a:rPr sz="1800" b="1" spc="-180" dirty="0">
-                <a:solidFill>
-                  <a:srgbClr val="002060"/>
-                </a:solidFill>
-                <a:latin typeface="Arial" panose="020B0604020202020204"/>
-                <a:cs typeface="Arial" panose="020B0604020202020204"/>
-              </a:rPr>
-              <a:t>‘</a:t>
+              <a:t> ‘</a:t>
             </a:r>
             <a:r>
               <a:rPr sz="1800" b="1" spc="-5" dirty="0">
@@ -10736,9 +10814,11 @@
         <p:spPr/>
         <p:txBody>
           <a:bodyPr/>
+          <a:lstStyle/>
           <a:p>
             <a:fld id="{B6F15528-21DE-4FAA-801E-634DDDAF4B2B}" type="slidenum">
               <a:rPr/>
+              <a:t>4</a:t>
             </a:fld>
             <a:endParaRPr/>
           </a:p>
@@ -10853,7 +10933,6 @@
               <a:rPr spc="-114" dirty="0"/>
               <a:t>o</a:t>
             </a:r>
-            <a:endParaRPr spc="-114" dirty="0"/>
           </a:p>
         </p:txBody>
       </p:sp>
@@ -10922,7 +11001,9 @@
           <p:txBody>
             <a:bodyPr wrap="square" lIns="0" tIns="0" rIns="0" bIns="0" rtlCol="0"/>
             <a:lstStyle/>
-            <a:p/>
+            <a:p>
+              <a:endParaRPr/>
+            </a:p>
           </p:txBody>
         </p:sp>
         <p:sp>
@@ -10978,7 +11059,9 @@
           <p:txBody>
             <a:bodyPr wrap="square" lIns="0" tIns="0" rIns="0" bIns="0" rtlCol="0"/>
             <a:lstStyle/>
-            <a:p/>
+            <a:p>
+              <a:endParaRPr/>
+            </a:p>
           </p:txBody>
         </p:sp>
         <p:sp>
@@ -11032,7 +11115,9 @@
           <p:txBody>
             <a:bodyPr wrap="square" lIns="0" tIns="0" rIns="0" bIns="0" rtlCol="0"/>
             <a:lstStyle/>
-            <a:p/>
+            <a:p>
+              <a:endParaRPr/>
+            </a:p>
           </p:txBody>
         </p:sp>
         <p:sp>
@@ -11086,7 +11171,9 @@
           <p:txBody>
             <a:bodyPr wrap="square" lIns="0" tIns="0" rIns="0" bIns="0" rtlCol="0"/>
             <a:lstStyle/>
-            <a:p/>
+            <a:p>
+              <a:endParaRPr/>
+            </a:p>
           </p:txBody>
         </p:sp>
         <p:sp>
@@ -11142,7 +11229,9 @@
           <p:txBody>
             <a:bodyPr wrap="square" lIns="0" tIns="0" rIns="0" bIns="0" rtlCol="0"/>
             <a:lstStyle/>
-            <a:p/>
+            <a:p>
+              <a:endParaRPr/>
+            </a:p>
           </p:txBody>
         </p:sp>
         <p:sp>
@@ -11196,7 +11285,9 @@
           <p:txBody>
             <a:bodyPr wrap="square" lIns="0" tIns="0" rIns="0" bIns="0" rtlCol="0"/>
             <a:lstStyle/>
-            <a:p/>
+            <a:p>
+              <a:endParaRPr/>
+            </a:p>
           </p:txBody>
         </p:sp>
         <p:sp>
@@ -11250,7 +11341,9 @@
           <p:txBody>
             <a:bodyPr wrap="square" lIns="0" tIns="0" rIns="0" bIns="0" rtlCol="0"/>
             <a:lstStyle/>
-            <a:p/>
+            <a:p>
+              <a:endParaRPr/>
+            </a:p>
           </p:txBody>
         </p:sp>
         <p:sp>
@@ -11306,7 +11399,9 @@
           <p:txBody>
             <a:bodyPr wrap="square" lIns="0" tIns="0" rIns="0" bIns="0" rtlCol="0"/>
             <a:lstStyle/>
-            <a:p/>
+            <a:p>
+              <a:endParaRPr/>
+            </a:p>
           </p:txBody>
         </p:sp>
       </p:grpSp>
@@ -11397,17 +11492,7 @@
                 <a:latin typeface="Tahoma" panose="020B0604030504040204"/>
                 <a:cs typeface="Tahoma" panose="020B0604030504040204"/>
               </a:rPr>
-              <a:t>r</a:t>
-            </a:r>
-            <a:r>
-              <a:rPr sz="1800" b="1" spc="-110" dirty="0">
-                <a:solidFill>
-                  <a:srgbClr val="FFFFFF"/>
-                </a:solidFill>
-                <a:latin typeface="Tahoma" panose="020B0604030504040204"/>
-                <a:cs typeface="Tahoma" panose="020B0604030504040204"/>
-              </a:rPr>
-              <a:t>”  </a:t>
+              <a:t>r”  </a:t>
             </a:r>
             <a:r>
               <a:rPr sz="1800" b="1" spc="-225" dirty="0">
@@ -11526,7 +11611,9 @@
           <p:txBody>
             <a:bodyPr wrap="square" lIns="0" tIns="0" rIns="0" bIns="0" rtlCol="0"/>
             <a:lstStyle/>
-            <a:p/>
+            <a:p>
+              <a:endParaRPr/>
+            </a:p>
           </p:txBody>
         </p:sp>
         <p:sp>
@@ -11580,7 +11667,9 @@
           <p:txBody>
             <a:bodyPr wrap="square" lIns="0" tIns="0" rIns="0" bIns="0" rtlCol="0"/>
             <a:lstStyle/>
-            <a:p/>
+            <a:p>
+              <a:endParaRPr/>
+            </a:p>
           </p:txBody>
         </p:sp>
         <p:sp>
@@ -11636,7 +11725,9 @@
           <p:txBody>
             <a:bodyPr wrap="square" lIns="0" tIns="0" rIns="0" bIns="0" rtlCol="0"/>
             <a:lstStyle/>
-            <a:p/>
+            <a:p>
+              <a:endParaRPr/>
+            </a:p>
           </p:txBody>
         </p:sp>
       </p:grpSp>
@@ -11781,7 +11872,9 @@
           <p:txBody>
             <a:bodyPr wrap="square" lIns="0" tIns="0" rIns="0" bIns="0" rtlCol="0"/>
             <a:lstStyle/>
-            <a:p/>
+            <a:p>
+              <a:endParaRPr/>
+            </a:p>
           </p:txBody>
         </p:sp>
         <p:sp>
@@ -11835,7 +11928,9 @@
           <p:txBody>
             <a:bodyPr wrap="square" lIns="0" tIns="0" rIns="0" bIns="0" rtlCol="0"/>
             <a:lstStyle/>
-            <a:p/>
+            <a:p>
+              <a:endParaRPr/>
+            </a:p>
           </p:txBody>
         </p:sp>
         <p:sp>
@@ -11891,7 +11986,9 @@
           <p:txBody>
             <a:bodyPr wrap="square" lIns="0" tIns="0" rIns="0" bIns="0" rtlCol="0"/>
             <a:lstStyle/>
-            <a:p/>
+            <a:p>
+              <a:endParaRPr/>
+            </a:p>
           </p:txBody>
         </p:sp>
       </p:grpSp>
@@ -12056,7 +12153,9 @@
           <p:txBody>
             <a:bodyPr wrap="square" lIns="0" tIns="0" rIns="0" bIns="0" rtlCol="0"/>
             <a:lstStyle/>
-            <a:p/>
+            <a:p>
+              <a:endParaRPr/>
+            </a:p>
           </p:txBody>
         </p:sp>
         <p:sp>
@@ -12112,7 +12211,9 @@
           <p:txBody>
             <a:bodyPr wrap="square" lIns="0" tIns="0" rIns="0" bIns="0" rtlCol="0"/>
             <a:lstStyle/>
-            <a:p/>
+            <a:p>
+              <a:endParaRPr/>
+            </a:p>
           </p:txBody>
         </p:sp>
       </p:grpSp>
@@ -12195,9 +12296,11 @@
         <p:spPr/>
         <p:txBody>
           <a:bodyPr/>
+          <a:lstStyle/>
           <a:p>
             <a:fld id="{B6F15528-21DE-4FAA-801E-634DDDAF4B2B}" type="slidenum">
               <a:rPr/>
+              <a:t>5</a:t>
             </a:fld>
             <a:endParaRPr/>
           </a:p>
@@ -12304,7 +12407,6 @@
               <a:rPr spc="-215" dirty="0"/>
               <a:t>ex</a:t>
             </a:r>
-            <a:endParaRPr spc="-215" dirty="0"/>
           </a:p>
         </p:txBody>
       </p:sp>
@@ -12367,7 +12469,9 @@
           <p:txBody>
             <a:bodyPr wrap="square" lIns="0" tIns="0" rIns="0" bIns="0" rtlCol="0"/>
             <a:lstStyle/>
-            <a:p/>
+            <a:p>
+              <a:endParaRPr/>
+            </a:p>
           </p:txBody>
         </p:sp>
         <p:sp>
@@ -12417,7 +12521,9 @@
           <p:txBody>
             <a:bodyPr wrap="square" lIns="0" tIns="0" rIns="0" bIns="0" rtlCol="0"/>
             <a:lstStyle/>
-            <a:p/>
+            <a:p>
+              <a:endParaRPr/>
+            </a:p>
           </p:txBody>
         </p:sp>
       </p:grpSp>
@@ -12451,55 +12557,83 @@
               </a:spcBef>
             </a:pPr>
             <a:r>
+              <a:rPr sz="1800" spc="-5" dirty="0" err="1">
+                <a:latin typeface="Consolas" panose="020B0609020204030204"/>
+                <a:cs typeface="Consolas" panose="020B0609020204030204"/>
+              </a:rPr>
+              <a:t>db.</a:t>
+            </a:r>
+            <a:r>
+              <a:rPr sz="1800" i="1" spc="-5" dirty="0" err="1">
+                <a:latin typeface="Consolas" panose="020B0609020204030204"/>
+                <a:cs typeface="Consolas" panose="020B0609020204030204"/>
+              </a:rPr>
+              <a:t>foo</a:t>
+            </a:r>
+            <a:r>
               <a:rPr sz="1800" spc="-5" dirty="0">
                 <a:latin typeface="Consolas" panose="020B0609020204030204"/>
                 <a:cs typeface="Consolas" panose="020B0609020204030204"/>
               </a:rPr>
-              <a:t>db.</a:t>
+              <a:t>.</a:t>
+            </a:r>
+            <a:r>
+              <a:rPr lang="en-IN" sz="1800" spc="-5" dirty="0" err="1">
+                <a:latin typeface="Consolas" panose="020B0609020204030204"/>
+                <a:cs typeface="Consolas" panose="020B0609020204030204"/>
+              </a:rPr>
+              <a:t>cr</a:t>
+            </a:r>
+            <a:r>
+              <a:rPr sz="1800" spc="-5" dirty="0">
+                <a:latin typeface="Consolas" panose="020B0609020204030204"/>
+                <a:cs typeface="Consolas" panose="020B0609020204030204"/>
+              </a:rPr>
+              <a:t>e</a:t>
+            </a:r>
+            <a:r>
+              <a:rPr lang="en-IN" sz="1800" spc="-5" dirty="0">
+                <a:latin typeface="Consolas" panose="020B0609020204030204"/>
+                <a:cs typeface="Consolas" panose="020B0609020204030204"/>
+              </a:rPr>
+              <a:t>ate</a:t>
+            </a:r>
+            <a:r>
+              <a:rPr sz="1800" spc="-5" dirty="0">
+                <a:latin typeface="Consolas" panose="020B0609020204030204"/>
+                <a:cs typeface="Consolas" panose="020B0609020204030204"/>
+              </a:rPr>
+              <a:t>Index(</a:t>
             </a:r>
             <a:r>
               <a:rPr sz="1800" i="1" spc="-5" dirty="0">
                 <a:latin typeface="Consolas" panose="020B0609020204030204"/>
                 <a:cs typeface="Consolas" panose="020B0609020204030204"/>
               </a:rPr>
-              <a:t>foo</a:t>
+              <a:t>keys,</a:t>
+            </a:r>
+            <a:r>
+              <a:rPr sz="1800" i="1" spc="-40" dirty="0">
+                <a:latin typeface="Consolas" panose="020B0609020204030204"/>
+                <a:cs typeface="Consolas" panose="020B0609020204030204"/>
+              </a:rPr>
+              <a:t> </a:t>
+            </a:r>
+            <a:r>
+              <a:rPr sz="1800" i="1" spc="-5" dirty="0">
+                <a:latin typeface="Consolas" panose="020B0609020204030204"/>
+                <a:cs typeface="Consolas" panose="020B0609020204030204"/>
+              </a:rPr>
+              <a:t>options</a:t>
             </a:r>
             <a:r>
               <a:rPr sz="1800" spc="-5" dirty="0">
                 <a:latin typeface="Consolas" panose="020B0609020204030204"/>
                 <a:cs typeface="Consolas" panose="020B0609020204030204"/>
               </a:rPr>
-              <a:t>.ensureIndex(</a:t>
-            </a:r>
-            <a:r>
-              <a:rPr sz="1800" i="1" spc="-5" dirty="0">
-                <a:latin typeface="Consolas" panose="020B0609020204030204"/>
-                <a:cs typeface="Consolas" panose="020B0609020204030204"/>
-              </a:rPr>
-              <a:t>keys,</a:t>
-            </a:r>
-            <a:r>
-              <a:rPr sz="1800" i="1" spc="-40" dirty="0">
-                <a:latin typeface="Consolas" panose="020B0609020204030204"/>
-                <a:cs typeface="Consolas" panose="020B0609020204030204"/>
-              </a:rPr>
-              <a:t> </a:t>
-            </a:r>
-            <a:r>
-              <a:rPr sz="1800" i="1" spc="-5" dirty="0">
-                <a:latin typeface="Consolas" panose="020B0609020204030204"/>
-                <a:cs typeface="Consolas" panose="020B0609020204030204"/>
-              </a:rPr>
-              <a:t>options</a:t>
-            </a:r>
-            <a:r>
-              <a:rPr sz="1800" spc="-5" dirty="0">
-                <a:latin typeface="Consolas" panose="020B0609020204030204"/>
-                <a:cs typeface="Consolas" panose="020B0609020204030204"/>
-              </a:rPr>
               <a:t>)</a:t>
             </a:r>
-            <a:endParaRPr sz="1800">
+            <a:endParaRPr sz="1800" dirty="0">
               <a:latin typeface="Consolas" panose="020B0609020204030204"/>
               <a:cs typeface="Consolas" panose="020B0609020204030204"/>
             </a:endParaRPr>
@@ -12679,7 +12813,9 @@
           <p:txBody>
             <a:bodyPr wrap="square" lIns="0" tIns="0" rIns="0" bIns="0" rtlCol="0"/>
             <a:lstStyle/>
-            <a:p/>
+            <a:p>
+              <a:endParaRPr/>
+            </a:p>
           </p:txBody>
         </p:sp>
         <p:sp>
@@ -12858,7 +12994,9 @@
           <p:txBody>
             <a:bodyPr wrap="square" lIns="0" tIns="0" rIns="0" bIns="0" rtlCol="0"/>
             <a:lstStyle/>
-            <a:p/>
+            <a:p>
+              <a:endParaRPr/>
+            </a:p>
           </p:txBody>
         </p:sp>
       </p:grpSp>
@@ -12871,7 +13009,7 @@
         <p:spPr>
           <a:xfrm>
             <a:off x="5489653" y="3579367"/>
-            <a:ext cx="1116330" cy="1855470"/>
+            <a:ext cx="1116330" cy="1552348"/>
           </a:xfrm>
           <a:prstGeom prst="rect">
             <a:avLst/>
@@ -12899,74 +13037,11 @@
               <a:t>Name? </a:t>
             </a:r>
             <a:r>
-              <a:rPr sz="2000" b="1" spc="-225" dirty="0">
-                <a:latin typeface="Arial" panose="020B0604020202020204"/>
-                <a:cs typeface="Arial" panose="020B0604020202020204"/>
-              </a:rPr>
-              <a:t> </a:t>
-            </a:r>
-            <a:r>
-              <a:rPr sz="2000" b="1" spc="-200" dirty="0">
-                <a:latin typeface="Arial" panose="020B0604020202020204"/>
-                <a:cs typeface="Arial" panose="020B0604020202020204"/>
-              </a:rPr>
-              <a:t>B</a:t>
-            </a:r>
-            <a:r>
-              <a:rPr sz="2000" b="1" spc="-275" dirty="0">
-                <a:latin typeface="Arial" panose="020B0604020202020204"/>
-                <a:cs typeface="Arial" panose="020B0604020202020204"/>
-              </a:rPr>
-              <a:t>u</a:t>
-            </a:r>
-            <a:r>
-              <a:rPr sz="2000" b="1" spc="-125" dirty="0">
-                <a:latin typeface="Arial" panose="020B0604020202020204"/>
-                <a:cs typeface="Arial" panose="020B0604020202020204"/>
-              </a:rPr>
-              <a:t>il</a:t>
-            </a:r>
-            <a:r>
-              <a:rPr sz="2000" b="1" spc="-180" dirty="0">
-                <a:latin typeface="Arial" panose="020B0604020202020204"/>
-                <a:cs typeface="Arial" panose="020B0604020202020204"/>
-              </a:rPr>
-              <a:t>d</a:t>
-            </a:r>
-            <a:r>
-              <a:rPr sz="2000" b="1" spc="-210" dirty="0">
-                <a:latin typeface="Arial" panose="020B0604020202020204"/>
-                <a:cs typeface="Arial" panose="020B0604020202020204"/>
-              </a:rPr>
-              <a:t> </a:t>
-            </a:r>
-            <a:r>
-              <a:rPr sz="2000" b="1" spc="-260" dirty="0">
-                <a:latin typeface="Arial" panose="020B0604020202020204"/>
-                <a:cs typeface="Arial" panose="020B0604020202020204"/>
-              </a:rPr>
-              <a:t>n</a:t>
-            </a:r>
-            <a:r>
-              <a:rPr sz="2000" b="1" spc="-245" dirty="0">
-                <a:latin typeface="Arial" panose="020B0604020202020204"/>
-                <a:cs typeface="Arial" panose="020B0604020202020204"/>
-              </a:rPr>
-              <a:t>o</a:t>
-            </a:r>
-            <a:r>
-              <a:rPr sz="2000" b="1" spc="-300" dirty="0">
-                <a:latin typeface="Arial" panose="020B0604020202020204"/>
-                <a:cs typeface="Arial" panose="020B0604020202020204"/>
-              </a:rPr>
-              <a:t>w</a:t>
-            </a:r>
-            <a:r>
               <a:rPr sz="2000" b="1" spc="-190" dirty="0">
                 <a:latin typeface="Arial" panose="020B0604020202020204"/>
                 <a:cs typeface="Arial" panose="020B0604020202020204"/>
               </a:rPr>
-              <a:t>?  </a:t>
+              <a:t> </a:t>
             </a:r>
             <a:r>
               <a:rPr sz="2000" b="1" spc="-220" dirty="0">
@@ -12989,7 +13064,7 @@
               </a:rPr>
               <a:t>Sparse?</a:t>
             </a:r>
-            <a:endParaRPr sz="2000">
+            <a:endParaRPr sz="2000" dirty="0">
               <a:latin typeface="Arial" panose="020B0604020202020204"/>
               <a:cs typeface="Arial" panose="020B0604020202020204"/>
             </a:endParaRPr>
@@ -13007,7 +13082,7 @@
               </a:rPr>
               <a:t>TTL?</a:t>
             </a:r>
-            <a:endParaRPr sz="2000">
+            <a:endParaRPr sz="2000" dirty="0">
               <a:latin typeface="Arial" panose="020B0604020202020204"/>
               <a:cs typeface="Arial" panose="020B0604020202020204"/>
             </a:endParaRPr>
@@ -13025,7 +13100,7 @@
               </a:rPr>
               <a:t>Language?</a:t>
             </a:r>
-            <a:endParaRPr sz="2000">
+            <a:endParaRPr sz="2000" dirty="0">
               <a:latin typeface="Arial" panose="020B0604020202020204"/>
               <a:cs typeface="Arial" panose="020B0604020202020204"/>
             </a:endParaRPr>
@@ -13202,7 +13277,9 @@
           <p:txBody>
             <a:bodyPr wrap="square" lIns="0" tIns="0" rIns="0" bIns="0" rtlCol="0"/>
             <a:lstStyle/>
-            <a:p/>
+            <a:p>
+              <a:endParaRPr/>
+            </a:p>
           </p:txBody>
         </p:sp>
         <p:sp>
@@ -13369,7 +13446,9 @@
           <p:txBody>
             <a:bodyPr wrap="square" lIns="0" tIns="0" rIns="0" bIns="0" rtlCol="0"/>
             <a:lstStyle/>
-            <a:p/>
+            <a:p>
+              <a:endParaRPr/>
+            </a:p>
           </p:txBody>
         </p:sp>
       </p:grpSp>
@@ -13762,7 +13841,9 @@
           <p:txBody>
             <a:bodyPr wrap="square" lIns="0" tIns="0" rIns="0" bIns="0" rtlCol="0"/>
             <a:lstStyle/>
-            <a:p/>
+            <a:p>
+              <a:endParaRPr/>
+            </a:p>
           </p:txBody>
         </p:sp>
         <p:sp>
@@ -13881,7 +13962,9 @@
           <p:txBody>
             <a:bodyPr wrap="square" lIns="0" tIns="0" rIns="0" bIns="0" rtlCol="0"/>
             <a:lstStyle/>
-            <a:p/>
+            <a:p>
+              <a:endParaRPr/>
+            </a:p>
           </p:txBody>
         </p:sp>
       </p:grpSp>
@@ -13997,9 +14080,11 @@
         <p:spPr/>
         <p:txBody>
           <a:bodyPr/>
+          <a:lstStyle/>
           <a:p>
             <a:fld id="{B6F15528-21DE-4FAA-801E-634DDDAF4B2B}" type="slidenum">
               <a:rPr/>
+              <a:t>6</a:t>
             </a:fld>
             <a:endParaRPr/>
           </a:p>
@@ -14017,6 +14102,541 @@
 </file>
 
 <file path=ppt/slides/slide7.xml><?xml version="1.0" encoding="utf-8"?>
+<p:sld xmlns:a="http://schemas.openxmlformats.org/drawingml/2006/main" xmlns:r="http://schemas.openxmlformats.org/officeDocument/2006/relationships" xmlns:p="http://schemas.openxmlformats.org/presentationml/2006/main">
+  <p:cSld>
+    <p:spTree>
+      <p:nvGrpSpPr>
+        <p:cNvPr id="1" name=""/>
+        <p:cNvGrpSpPr/>
+        <p:nvPr/>
+      </p:nvGrpSpPr>
+      <p:grpSpPr>
+        <a:xfrm>
+          <a:off x="0" y="0"/>
+          <a:ext cx="0" cy="0"/>
+          <a:chOff x="0" y="0"/>
+          <a:chExt cx="0" cy="0"/>
+        </a:xfrm>
+      </p:grpSpPr>
+      <p:sp>
+        <p:nvSpPr>
+          <p:cNvPr id="3" name="Text Placeholder 2">
+            <a:extLst>
+              <a:ext uri="{FF2B5EF4-FFF2-40B4-BE49-F238E27FC236}">
+                <a16:creationId xmlns:a16="http://schemas.microsoft.com/office/drawing/2014/main" id="{70BE8831-E706-5B9F-4320-F8C0189348D3}"/>
+              </a:ext>
+            </a:extLst>
+          </p:cNvPr>
+          <p:cNvSpPr>
+            <a:spLocks noGrp="1"/>
+          </p:cNvSpPr>
+          <p:nvPr>
+            <p:ph type="body" idx="1"/>
+          </p:nvPr>
+        </p:nvSpPr>
+        <p:spPr/>
+        <p:txBody>
+          <a:bodyPr/>
+          <a:lstStyle/>
+          <a:p>
+            <a:endParaRPr lang="en-IN"/>
+          </a:p>
+        </p:txBody>
+      </p:sp>
+      <p:sp>
+        <p:nvSpPr>
+          <p:cNvPr id="4" name="Slide Number Placeholder 3">
+            <a:extLst>
+              <a:ext uri="{FF2B5EF4-FFF2-40B4-BE49-F238E27FC236}">
+                <a16:creationId xmlns:a16="http://schemas.microsoft.com/office/drawing/2014/main" id="{043C9F7B-3704-BBBE-E045-DF450F6946D3}"/>
+              </a:ext>
+            </a:extLst>
+          </p:cNvPr>
+          <p:cNvSpPr>
+            <a:spLocks noGrp="1"/>
+          </p:cNvSpPr>
+          <p:nvPr>
+            <p:ph type="sldNum" sz="quarter" idx="7"/>
+          </p:nvPr>
+        </p:nvSpPr>
+        <p:spPr/>
+        <p:txBody>
+          <a:bodyPr/>
+          <a:lstStyle/>
+          <a:p>
+            <a:fld id="{B6F15528-21DE-4FAA-801E-634DDDAF4B2B}" type="slidenum">
+              <a:rPr lang="en-IN" smtClean="0"/>
+              <a:t>7</a:t>
+            </a:fld>
+            <a:endParaRPr lang="en-IN"/>
+          </a:p>
+        </p:txBody>
+      </p:sp>
+      <p:graphicFrame>
+        <p:nvGraphicFramePr>
+          <p:cNvPr id="5" name="Table 4">
+            <a:extLst>
+              <a:ext uri="{FF2B5EF4-FFF2-40B4-BE49-F238E27FC236}">
+                <a16:creationId xmlns:a16="http://schemas.microsoft.com/office/drawing/2014/main" id="{BD5DE94D-262D-14A2-5FF6-4D43193C3869}"/>
+              </a:ext>
+            </a:extLst>
+          </p:cNvPr>
+          <p:cNvGraphicFramePr>
+            <a:graphicFrameLocks noGrp="1"/>
+          </p:cNvGraphicFramePr>
+          <p:nvPr>
+            <p:extLst>
+              <p:ext uri="{D42A27DB-BD31-4B8C-83A1-F6EECF244321}">
+                <p14:modId xmlns:p14="http://schemas.microsoft.com/office/powerpoint/2010/main" val="4028496232"/>
+              </p:ext>
+            </p:extLst>
+          </p:nvPr>
+        </p:nvGraphicFramePr>
+        <p:xfrm>
+          <a:off x="536574" y="762000"/>
+          <a:ext cx="8071485" cy="5257800"/>
+        </p:xfrm>
+        <a:graphic>
+          <a:graphicData uri="http://schemas.openxmlformats.org/drawingml/2006/table">
+            <a:tbl>
+              <a:tblPr firstRow="1" firstCol="1" bandRow="1">
+                <a:tableStyleId>{5C22544A-7EE6-4342-B048-85BDC9FD1C3A}</a:tableStyleId>
+              </a:tblPr>
+              <a:tblGrid>
+                <a:gridCol w="2690495">
+                  <a:extLst>
+                    <a:ext uri="{9D8B030D-6E8A-4147-A177-3AD203B41FA5}">
+                      <a16:colId xmlns:a16="http://schemas.microsoft.com/office/drawing/2014/main" val="2178423662"/>
+                    </a:ext>
+                  </a:extLst>
+                </a:gridCol>
+                <a:gridCol w="2690495">
+                  <a:extLst>
+                    <a:ext uri="{9D8B030D-6E8A-4147-A177-3AD203B41FA5}">
+                      <a16:colId xmlns:a16="http://schemas.microsoft.com/office/drawing/2014/main" val="65351399"/>
+                    </a:ext>
+                  </a:extLst>
+                </a:gridCol>
+                <a:gridCol w="2690495">
+                  <a:extLst>
+                    <a:ext uri="{9D8B030D-6E8A-4147-A177-3AD203B41FA5}">
+                      <a16:colId xmlns:a16="http://schemas.microsoft.com/office/drawing/2014/main" val="1890627057"/>
+                    </a:ext>
+                  </a:extLst>
+                </a:gridCol>
+              </a:tblGrid>
+              <a:tr h="833298">
+                <a:tc>
+                  <a:txBody>
+                    <a:bodyPr/>
+                    <a:lstStyle/>
+                    <a:p>
+                      <a:pPr>
+                        <a:lnSpc>
+                          <a:spcPct val="115000"/>
+                        </a:lnSpc>
+                        <a:spcAft>
+                          <a:spcPts val="1000"/>
+                        </a:spcAft>
+                        <a:buNone/>
+                      </a:pPr>
+                      <a:r>
+                        <a:rPr lang="en-IN" sz="2000" dirty="0">
+                          <a:effectLst/>
+                        </a:rPr>
+                        <a:t>Legacy Term </a:t>
+                      </a:r>
+                      <a:endParaRPr lang="en-IN" sz="2000" dirty="0">
+                        <a:effectLst/>
+                        <a:latin typeface="Calibri" panose="020F0502020204030204" pitchFamily="34" charset="0"/>
+                        <a:ea typeface="Calibri" panose="020F0502020204030204" pitchFamily="34" charset="0"/>
+                        <a:cs typeface="Times New Roman" panose="02020603050405020304" pitchFamily="18" charset="0"/>
+                      </a:endParaRPr>
+                    </a:p>
+                  </a:txBody>
+                  <a:tcPr marL="114300" marR="114300" marT="76200" marB="76200" anchor="ctr"/>
+                </a:tc>
+                <a:tc>
+                  <a:txBody>
+                    <a:bodyPr/>
+                    <a:lstStyle/>
+                    <a:p>
+                      <a:pPr>
+                        <a:lnSpc>
+                          <a:spcPct val="115000"/>
+                        </a:lnSpc>
+                        <a:spcAft>
+                          <a:spcPts val="1000"/>
+                        </a:spcAft>
+                        <a:buNone/>
+                      </a:pPr>
+                      <a:r>
+                        <a:rPr lang="en-IN" sz="2000" dirty="0">
+                          <a:effectLst/>
+                        </a:rPr>
+                        <a:t>Modern Field in </a:t>
+                      </a:r>
+                      <a:r>
+                        <a:rPr lang="en-IN" sz="2000" dirty="0" err="1">
+                          <a:effectLst/>
+                        </a:rPr>
+                        <a:t>executionStats</a:t>
+                      </a:r>
+                      <a:endParaRPr lang="en-IN" sz="2000" dirty="0">
+                        <a:effectLst/>
+                        <a:latin typeface="Calibri" panose="020F0502020204030204" pitchFamily="34" charset="0"/>
+                        <a:ea typeface="Calibri" panose="020F0502020204030204" pitchFamily="34" charset="0"/>
+                        <a:cs typeface="Times New Roman" panose="02020603050405020304" pitchFamily="18" charset="0"/>
+                      </a:endParaRPr>
+                    </a:p>
+                  </a:txBody>
+                  <a:tcPr marL="114300" marR="114300" marT="76200" marB="76200" anchor="ctr"/>
+                </a:tc>
+                <a:tc>
+                  <a:txBody>
+                    <a:bodyPr/>
+                    <a:lstStyle/>
+                    <a:p>
+                      <a:pPr>
+                        <a:lnSpc>
+                          <a:spcPct val="115000"/>
+                        </a:lnSpc>
+                        <a:spcAft>
+                          <a:spcPts val="1000"/>
+                        </a:spcAft>
+                        <a:buNone/>
+                      </a:pPr>
+                      <a:r>
+                        <a:rPr lang="en-IN" sz="2000">
+                          <a:effectLst/>
+                        </a:rPr>
+                        <a:t>Meaning</a:t>
+                      </a:r>
+                      <a:endParaRPr lang="en-IN" sz="2000">
+                        <a:effectLst/>
+                        <a:latin typeface="Calibri" panose="020F0502020204030204" pitchFamily="34" charset="0"/>
+                        <a:ea typeface="Calibri" panose="020F0502020204030204" pitchFamily="34" charset="0"/>
+                        <a:cs typeface="Times New Roman" panose="02020603050405020304" pitchFamily="18" charset="0"/>
+                      </a:endParaRPr>
+                    </a:p>
+                  </a:txBody>
+                  <a:tcPr marL="114300" marR="114300" marT="76200" marB="76200" anchor="ctr"/>
+                </a:tc>
+                <a:extLst>
+                  <a:ext uri="{0D108BD9-81ED-4DB2-BD59-A6C34878D82A}">
+                    <a16:rowId xmlns:a16="http://schemas.microsoft.com/office/drawing/2014/main" val="392940110"/>
+                  </a:ext>
+                </a:extLst>
+              </a:tr>
+              <a:tr h="1314450">
+                <a:tc>
+                  <a:txBody>
+                    <a:bodyPr/>
+                    <a:lstStyle/>
+                    <a:p>
+                      <a:pPr>
+                        <a:lnSpc>
+                          <a:spcPct val="115000"/>
+                        </a:lnSpc>
+                        <a:spcAft>
+                          <a:spcPts val="1000"/>
+                        </a:spcAft>
+                        <a:buNone/>
+                      </a:pPr>
+                      <a:r>
+                        <a:rPr lang="en-IN" sz="2000">
+                          <a:effectLst/>
+                        </a:rPr>
+                        <a:t>nscanned </a:t>
+                      </a:r>
+                      <a:endParaRPr lang="en-IN" sz="2000">
+                        <a:effectLst/>
+                        <a:latin typeface="Calibri" panose="020F0502020204030204" pitchFamily="34" charset="0"/>
+                        <a:ea typeface="Calibri" panose="020F0502020204030204" pitchFamily="34" charset="0"/>
+                        <a:cs typeface="Times New Roman" panose="02020603050405020304" pitchFamily="18" charset="0"/>
+                      </a:endParaRPr>
+                    </a:p>
+                  </a:txBody>
+                  <a:tcPr marL="114300" marR="114300" marT="76200" marB="76200" anchor="ctr"/>
+                </a:tc>
+                <a:tc>
+                  <a:txBody>
+                    <a:bodyPr/>
+                    <a:lstStyle/>
+                    <a:p>
+                      <a:pPr>
+                        <a:lnSpc>
+                          <a:spcPct val="115000"/>
+                        </a:lnSpc>
+                        <a:spcAft>
+                          <a:spcPts val="1000"/>
+                        </a:spcAft>
+                        <a:buNone/>
+                      </a:pPr>
+                      <a:r>
+                        <a:rPr lang="en-IN" sz="2000">
+                          <a:effectLst/>
+                        </a:rPr>
+                        <a:t>totalKeysExamined</a:t>
+                      </a:r>
+                      <a:endParaRPr lang="en-IN" sz="2000">
+                        <a:effectLst/>
+                        <a:latin typeface="Calibri" panose="020F0502020204030204" pitchFamily="34" charset="0"/>
+                        <a:ea typeface="Calibri" panose="020F0502020204030204" pitchFamily="34" charset="0"/>
+                        <a:cs typeface="Times New Roman" panose="02020603050405020304" pitchFamily="18" charset="0"/>
+                      </a:endParaRPr>
+                    </a:p>
+                  </a:txBody>
+                  <a:tcPr marL="114300" marR="114300" marT="76200" marB="76200" anchor="ctr"/>
+                </a:tc>
+                <a:tc>
+                  <a:txBody>
+                    <a:bodyPr/>
+                    <a:lstStyle/>
+                    <a:p>
+                      <a:pPr>
+                        <a:lnSpc>
+                          <a:spcPct val="115000"/>
+                        </a:lnSpc>
+                        <a:spcAft>
+                          <a:spcPts val="1000"/>
+                        </a:spcAft>
+                        <a:buNone/>
+                      </a:pPr>
+                      <a:r>
+                        <a:rPr lang="en-IN" sz="2000">
+                          <a:effectLst/>
+                        </a:rPr>
+                        <a:t>The number of index entries the database had to look at.</a:t>
+                      </a:r>
+                      <a:endParaRPr lang="en-IN" sz="2000">
+                        <a:effectLst/>
+                        <a:latin typeface="Calibri" panose="020F0502020204030204" pitchFamily="34" charset="0"/>
+                        <a:ea typeface="Calibri" panose="020F0502020204030204" pitchFamily="34" charset="0"/>
+                        <a:cs typeface="Times New Roman" panose="02020603050405020304" pitchFamily="18" charset="0"/>
+                      </a:endParaRPr>
+                    </a:p>
+                  </a:txBody>
+                  <a:tcPr marL="114300" marR="114300" marT="76200" marB="76200" anchor="ctr"/>
+                </a:tc>
+                <a:extLst>
+                  <a:ext uri="{0D108BD9-81ED-4DB2-BD59-A6C34878D82A}">
+                    <a16:rowId xmlns:a16="http://schemas.microsoft.com/office/drawing/2014/main" val="3359637541"/>
+                  </a:ext>
+                </a:extLst>
+              </a:tr>
+              <a:tr h="1314450">
+                <a:tc>
+                  <a:txBody>
+                    <a:bodyPr/>
+                    <a:lstStyle/>
+                    <a:p>
+                      <a:pPr>
+                        <a:lnSpc>
+                          <a:spcPct val="115000"/>
+                        </a:lnSpc>
+                        <a:spcAft>
+                          <a:spcPts val="1000"/>
+                        </a:spcAft>
+                        <a:buNone/>
+                      </a:pPr>
+                      <a:r>
+                        <a:rPr lang="en-IN" sz="2000">
+                          <a:effectLst/>
+                        </a:rPr>
+                        <a:t>nscannedObjects</a:t>
+                      </a:r>
+                      <a:endParaRPr lang="en-IN" sz="2000">
+                        <a:effectLst/>
+                        <a:latin typeface="Calibri" panose="020F0502020204030204" pitchFamily="34" charset="0"/>
+                        <a:ea typeface="Calibri" panose="020F0502020204030204" pitchFamily="34" charset="0"/>
+                        <a:cs typeface="Times New Roman" panose="02020603050405020304" pitchFamily="18" charset="0"/>
+                      </a:endParaRPr>
+                    </a:p>
+                  </a:txBody>
+                  <a:tcPr marL="114300" marR="114300" marT="76200" marB="76200" anchor="ctr"/>
+                </a:tc>
+                <a:tc>
+                  <a:txBody>
+                    <a:bodyPr/>
+                    <a:lstStyle/>
+                    <a:p>
+                      <a:pPr>
+                        <a:lnSpc>
+                          <a:spcPct val="115000"/>
+                        </a:lnSpc>
+                        <a:spcAft>
+                          <a:spcPts val="1000"/>
+                        </a:spcAft>
+                        <a:buNone/>
+                      </a:pPr>
+                      <a:r>
+                        <a:rPr lang="en-IN" sz="2000">
+                          <a:effectLst/>
+                        </a:rPr>
+                        <a:t>totalDocsExamined</a:t>
+                      </a:r>
+                      <a:endParaRPr lang="en-IN" sz="2000">
+                        <a:effectLst/>
+                        <a:latin typeface="Calibri" panose="020F0502020204030204" pitchFamily="34" charset="0"/>
+                        <a:ea typeface="Calibri" panose="020F0502020204030204" pitchFamily="34" charset="0"/>
+                        <a:cs typeface="Times New Roman" panose="02020603050405020304" pitchFamily="18" charset="0"/>
+                      </a:endParaRPr>
+                    </a:p>
+                  </a:txBody>
+                  <a:tcPr marL="114300" marR="114300" marT="76200" marB="76200" anchor="ctr"/>
+                </a:tc>
+                <a:tc>
+                  <a:txBody>
+                    <a:bodyPr/>
+                    <a:lstStyle/>
+                    <a:p>
+                      <a:pPr>
+                        <a:lnSpc>
+                          <a:spcPct val="115000"/>
+                        </a:lnSpc>
+                        <a:spcAft>
+                          <a:spcPts val="1000"/>
+                        </a:spcAft>
+                        <a:buNone/>
+                      </a:pPr>
+                      <a:r>
+                        <a:rPr lang="en-IN" sz="2000">
+                          <a:effectLst/>
+                        </a:rPr>
+                        <a:t>The actual number of documents loaded from disk.</a:t>
+                      </a:r>
+                      <a:endParaRPr lang="en-IN" sz="2000">
+                        <a:effectLst/>
+                        <a:latin typeface="Calibri" panose="020F0502020204030204" pitchFamily="34" charset="0"/>
+                        <a:ea typeface="Calibri" panose="020F0502020204030204" pitchFamily="34" charset="0"/>
+                        <a:cs typeface="Times New Roman" panose="02020603050405020304" pitchFamily="18" charset="0"/>
+                      </a:endParaRPr>
+                    </a:p>
+                  </a:txBody>
+                  <a:tcPr marL="114300" marR="114300" marT="76200" marB="76200" anchor="ctr"/>
+                </a:tc>
+                <a:extLst>
+                  <a:ext uri="{0D108BD9-81ED-4DB2-BD59-A6C34878D82A}">
+                    <a16:rowId xmlns:a16="http://schemas.microsoft.com/office/drawing/2014/main" val="1183128646"/>
+                  </a:ext>
+                </a:extLst>
+              </a:tr>
+              <a:tr h="1795602">
+                <a:tc>
+                  <a:txBody>
+                    <a:bodyPr/>
+                    <a:lstStyle/>
+                    <a:p>
+                      <a:pPr>
+                        <a:lnSpc>
+                          <a:spcPct val="115000"/>
+                        </a:lnSpc>
+                        <a:spcAft>
+                          <a:spcPts val="1000"/>
+                        </a:spcAft>
+                        <a:buNone/>
+                      </a:pPr>
+                      <a:r>
+                        <a:rPr lang="en-IN" sz="2000">
+                          <a:effectLst/>
+                        </a:rPr>
+                        <a:t>n</a:t>
+                      </a:r>
+                      <a:endParaRPr lang="en-IN" sz="2000">
+                        <a:effectLst/>
+                        <a:latin typeface="Calibri" panose="020F0502020204030204" pitchFamily="34" charset="0"/>
+                        <a:ea typeface="Calibri" panose="020F0502020204030204" pitchFamily="34" charset="0"/>
+                        <a:cs typeface="Times New Roman" panose="02020603050405020304" pitchFamily="18" charset="0"/>
+                      </a:endParaRPr>
+                    </a:p>
+                  </a:txBody>
+                  <a:tcPr marL="114300" marR="114300" marT="76200" marB="76200" anchor="ctr"/>
+                </a:tc>
+                <a:tc>
+                  <a:txBody>
+                    <a:bodyPr/>
+                    <a:lstStyle/>
+                    <a:p>
+                      <a:pPr>
+                        <a:lnSpc>
+                          <a:spcPct val="115000"/>
+                        </a:lnSpc>
+                        <a:spcAft>
+                          <a:spcPts val="1000"/>
+                        </a:spcAft>
+                        <a:buNone/>
+                      </a:pPr>
+                      <a:r>
+                        <a:rPr lang="en-IN" sz="2000">
+                          <a:effectLst/>
+                        </a:rPr>
+                        <a:t>nReturned</a:t>
+                      </a:r>
+                      <a:endParaRPr lang="en-IN" sz="2000">
+                        <a:effectLst/>
+                        <a:latin typeface="Calibri" panose="020F0502020204030204" pitchFamily="34" charset="0"/>
+                        <a:ea typeface="Calibri" panose="020F0502020204030204" pitchFamily="34" charset="0"/>
+                        <a:cs typeface="Times New Roman" panose="02020603050405020304" pitchFamily="18" charset="0"/>
+                      </a:endParaRPr>
+                    </a:p>
+                  </a:txBody>
+                  <a:tcPr marL="114300" marR="114300" marT="76200" marB="76200" anchor="ctr"/>
+                </a:tc>
+                <a:tc>
+                  <a:txBody>
+                    <a:bodyPr/>
+                    <a:lstStyle/>
+                    <a:p>
+                      <a:pPr>
+                        <a:lnSpc>
+                          <a:spcPct val="115000"/>
+                        </a:lnSpc>
+                        <a:spcAft>
+                          <a:spcPts val="1000"/>
+                        </a:spcAft>
+                        <a:buNone/>
+                      </a:pPr>
+                      <a:r>
+                        <a:rPr lang="en-IN" sz="2000" dirty="0">
+                          <a:effectLst/>
+                        </a:rPr>
+                        <a:t>The number of documents that actually matched and were returned to you.</a:t>
+                      </a:r>
+                      <a:endParaRPr lang="en-IN" sz="2000" dirty="0">
+                        <a:effectLst/>
+                        <a:latin typeface="Calibri" panose="020F0502020204030204" pitchFamily="34" charset="0"/>
+                        <a:ea typeface="Calibri" panose="020F0502020204030204" pitchFamily="34" charset="0"/>
+                        <a:cs typeface="Times New Roman" panose="02020603050405020304" pitchFamily="18" charset="0"/>
+                      </a:endParaRPr>
+                    </a:p>
+                  </a:txBody>
+                  <a:tcPr marL="114300" marR="114300" marT="76200" marB="76200" anchor="ctr"/>
+                </a:tc>
+                <a:extLst>
+                  <a:ext uri="{0D108BD9-81ED-4DB2-BD59-A6C34878D82A}">
+                    <a16:rowId xmlns:a16="http://schemas.microsoft.com/office/drawing/2014/main" val="2508057666"/>
+                  </a:ext>
+                </a:extLst>
+              </a:tr>
+            </a:tbl>
+          </a:graphicData>
+        </a:graphic>
+      </p:graphicFrame>
+    </p:spTree>
+    <p:extLst>
+      <p:ext uri="{BB962C8B-B14F-4D97-AF65-F5344CB8AC3E}">
+        <p14:creationId xmlns:p14="http://schemas.microsoft.com/office/powerpoint/2010/main" val="1914357241"/>
+      </p:ext>
+    </p:extLst>
+  </p:cSld>
+  <p:clrMapOvr>
+    <a:masterClrMapping/>
+  </p:clrMapOvr>
+</p:sld>
+</file>
+
+<file path=ppt/slides/slide8.xml><?xml version="1.0" encoding="utf-8"?>
 <p:sld xmlns:a="http://schemas.openxmlformats.org/drawingml/2006/main" xmlns:r="http://schemas.openxmlformats.org/officeDocument/2006/relationships" xmlns:p="http://schemas.openxmlformats.org/presentationml/2006/main" showMasterSp="0">
   <p:cSld>
     <p:spTree>
@@ -14070,7 +14690,6 @@
               <a:rPr spc="-215" dirty="0"/>
               <a:t>Summary</a:t>
             </a:r>
-            <a:endParaRPr spc="-215" dirty="0"/>
           </a:p>
         </p:txBody>
       </p:sp>
@@ -14323,77 +14942,63 @@
                 <a:latin typeface="Tahoma" panose="020B0604030504040204"/>
                 <a:cs typeface="Tahoma" panose="020B0604030504040204"/>
               </a:rPr>
+              <a:t> a</a:t>
+            </a:r>
+            <a:r>
+              <a:rPr sz="2000" b="1" spc="-130" dirty="0">
+                <a:latin typeface="Tahoma" panose="020B0604030504040204"/>
+                <a:cs typeface="Tahoma" panose="020B0604030504040204"/>
+              </a:rPr>
+              <a:t>n</a:t>
+            </a:r>
+            <a:r>
+              <a:rPr sz="2000" b="1" spc="-95" dirty="0">
+                <a:latin typeface="Tahoma" panose="020B0604030504040204"/>
+                <a:cs typeface="Tahoma" panose="020B0604030504040204"/>
+              </a:rPr>
+              <a:t>d</a:t>
+            </a:r>
+            <a:r>
+              <a:rPr sz="2000" b="1" spc="-180" dirty="0">
+                <a:latin typeface="Tahoma" panose="020B0604030504040204"/>
+                <a:cs typeface="Tahoma" panose="020B0604030504040204"/>
+              </a:rPr>
               <a:t> </a:t>
             </a:r>
             <a:r>
+              <a:rPr sz="2000" b="1" spc="-145" dirty="0">
+                <a:latin typeface="Tahoma" panose="020B0604030504040204"/>
+                <a:cs typeface="Tahoma" panose="020B0604030504040204"/>
+              </a:rPr>
+              <a:t>u</a:t>
+            </a:r>
+            <a:r>
+              <a:rPr sz="2000" b="1" spc="-195" dirty="0">
+                <a:latin typeface="Tahoma" panose="020B0604030504040204"/>
+                <a:cs typeface="Tahoma" panose="020B0604030504040204"/>
+              </a:rPr>
+              <a:t>s</a:t>
+            </a:r>
+            <a:r>
+              <a:rPr sz="2000" b="1" spc="-155" dirty="0">
+                <a:latin typeface="Tahoma" panose="020B0604030504040204"/>
+                <a:cs typeface="Tahoma" panose="020B0604030504040204"/>
+              </a:rPr>
+              <a:t>e</a:t>
+            </a:r>
+            <a:r>
               <a:rPr sz="2000" b="1" spc="-180" dirty="0">
                 <a:latin typeface="Tahoma" panose="020B0604030504040204"/>
                 <a:cs typeface="Tahoma" panose="020B0604030504040204"/>
               </a:rPr>
-              <a:t>a</a:t>
+              <a:t> </a:t>
             </a:r>
             <a:r>
               <a:rPr sz="2000" b="1" spc="-130" dirty="0">
                 <a:latin typeface="Tahoma" panose="020B0604030504040204"/>
                 <a:cs typeface="Tahoma" panose="020B0604030504040204"/>
               </a:rPr>
-              <a:t>n</a:t>
-            </a:r>
-            <a:r>
-              <a:rPr sz="2000" b="1" spc="-95" dirty="0">
-                <a:latin typeface="Tahoma" panose="020B0604030504040204"/>
-                <a:cs typeface="Tahoma" panose="020B0604030504040204"/>
-              </a:rPr>
-              <a:t>d</a:t>
-            </a:r>
-            <a:r>
-              <a:rPr sz="2000" b="1" spc="-180" dirty="0">
-                <a:latin typeface="Tahoma" panose="020B0604030504040204"/>
-                <a:cs typeface="Tahoma" panose="020B0604030504040204"/>
-              </a:rPr>
-              <a:t> </a:t>
-            </a:r>
-            <a:r>
-              <a:rPr sz="2000" b="1" spc="-145" dirty="0">
-                <a:latin typeface="Tahoma" panose="020B0604030504040204"/>
-                <a:cs typeface="Tahoma" panose="020B0604030504040204"/>
-              </a:rPr>
-              <a:t>u</a:t>
-            </a:r>
-            <a:r>
-              <a:rPr sz="2000" b="1" spc="-195" dirty="0">
-                <a:latin typeface="Tahoma" panose="020B0604030504040204"/>
-                <a:cs typeface="Tahoma" panose="020B0604030504040204"/>
-              </a:rPr>
-              <a:t>s</a:t>
-            </a:r>
-            <a:r>
-              <a:rPr sz="2000" b="1" spc="-155" dirty="0">
-                <a:latin typeface="Tahoma" panose="020B0604030504040204"/>
-                <a:cs typeface="Tahoma" panose="020B0604030504040204"/>
-              </a:rPr>
-              <a:t>e</a:t>
-            </a:r>
-            <a:r>
-              <a:rPr sz="2000" b="1" spc="-180" dirty="0">
-                <a:latin typeface="Tahoma" panose="020B0604030504040204"/>
-                <a:cs typeface="Tahoma" panose="020B0604030504040204"/>
-              </a:rPr>
-              <a:t> </a:t>
-            </a:r>
-            <a:r>
-              <a:rPr sz="2000" b="1" spc="-130" dirty="0">
-                <a:latin typeface="Tahoma" panose="020B0604030504040204"/>
-                <a:cs typeface="Tahoma" panose="020B0604030504040204"/>
-              </a:rPr>
-              <a:t>t</a:t>
-            </a:r>
-            <a:r>
-              <a:rPr sz="2000" b="1" spc="-130" dirty="0">
-                <a:latin typeface="Tahoma" panose="020B0604030504040204"/>
-                <a:cs typeface="Tahoma" panose="020B0604030504040204"/>
-              </a:rPr>
-              <a:t>h</a:t>
+              <a:t>th</a:t>
             </a:r>
             <a:r>
               <a:rPr sz="2000" b="1" spc="-190" dirty="0">
@@ -14430,7 +15035,7 @@
             <p:nvPr/>
           </p:nvPicPr>
           <p:blipFill>
-            <a:blip r:embed="rId1" cstate="print"/>
+            <a:blip r:embed="rId2" cstate="print"/>
             <a:stretch>
               <a:fillRect/>
             </a:stretch>
@@ -14452,7 +15057,7 @@
             <p:nvPr/>
           </p:nvPicPr>
           <p:blipFill>
-            <a:blip r:embed="rId2" cstate="print"/>
+            <a:blip r:embed="rId3" cstate="print"/>
             <a:stretch>
               <a:fillRect/>
             </a:stretch>
@@ -14474,7 +15079,7 @@
             <p:nvPr/>
           </p:nvPicPr>
           <p:blipFill>
-            <a:blip r:embed="rId3" cstate="print"/>
+            <a:blip r:embed="rId4" cstate="print"/>
             <a:stretch>
               <a:fillRect/>
             </a:stretch>
@@ -14614,9 +15219,11 @@
         <p:spPr/>
         <p:txBody>
           <a:bodyPr/>
+          <a:lstStyle/>
           <a:p>
             <a:fld id="{B6F15528-21DE-4FAA-801E-634DDDAF4B2B}" type="slidenum">
               <a:rPr/>
+              <a:t>8</a:t>
             </a:fld>
             <a:endParaRPr/>
           </a:p>
@@ -14633,7 +15240,7 @@
 </p:sld>
 </file>
 
-<file path=ppt/slides/slide8.xml><?xml version="1.0" encoding="utf-8"?>
+<file path=ppt/slides/slide9.xml><?xml version="1.0" encoding="utf-8"?>
 <p:sld xmlns:a="http://schemas.openxmlformats.org/drawingml/2006/main" xmlns:r="http://schemas.openxmlformats.org/officeDocument/2006/relationships" xmlns:p="http://schemas.openxmlformats.org/presentationml/2006/main" showMasterSp="0">
   <p:cSld>
     <p:spTree>
@@ -14687,7 +15294,6 @@
               <a:rPr spc="-155" dirty="0"/>
               <a:t>Conclusion</a:t>
             </a:r>
-            <a:endParaRPr spc="-155" dirty="0"/>
           </a:p>
         </p:txBody>
       </p:sp>
@@ -15203,7 +15809,9 @@
           <p:txBody>
             <a:bodyPr wrap="square" lIns="0" tIns="0" rIns="0" bIns="0" rtlCol="0"/>
             <a:lstStyle/>
-            <a:p/>
+            <a:p>
+              <a:endParaRPr/>
+            </a:p>
           </p:txBody>
         </p:sp>
         <p:sp>
@@ -15709,7 +16317,9 @@
           <p:txBody>
             <a:bodyPr wrap="square" lIns="0" tIns="0" rIns="0" bIns="0" rtlCol="0"/>
             <a:lstStyle/>
-            <a:p/>
+            <a:p>
+              <a:endParaRPr/>
+            </a:p>
           </p:txBody>
         </p:sp>
         <p:sp>
@@ -15759,7 +16369,9 @@
           <p:txBody>
             <a:bodyPr wrap="square" lIns="0" tIns="0" rIns="0" bIns="0" rtlCol="0"/>
             <a:lstStyle/>
-            <a:p/>
+            <a:p>
+              <a:endParaRPr/>
+            </a:p>
           </p:txBody>
         </p:sp>
         <p:sp>
@@ -15809,7 +16421,9 @@
           <p:txBody>
             <a:bodyPr wrap="square" lIns="0" tIns="0" rIns="0" bIns="0" rtlCol="0"/>
             <a:lstStyle/>
-            <a:p/>
+            <a:p>
+              <a:endParaRPr/>
+            </a:p>
           </p:txBody>
         </p:sp>
         <p:sp>
@@ -16214,7 +16828,9 @@
           <p:txBody>
             <a:bodyPr wrap="square" lIns="0" tIns="0" rIns="0" bIns="0" rtlCol="0"/>
             <a:lstStyle/>
-            <a:p/>
+            <a:p>
+              <a:endParaRPr/>
+            </a:p>
           </p:txBody>
         </p:sp>
         <p:sp>
@@ -16624,7 +17240,9 @@
           <p:txBody>
             <a:bodyPr wrap="square" lIns="0" tIns="0" rIns="0" bIns="0" rtlCol="0"/>
             <a:lstStyle/>
-            <a:p/>
+            <a:p>
+              <a:endParaRPr/>
+            </a:p>
           </p:txBody>
         </p:sp>
         <p:sp>
@@ -16674,7 +17292,9 @@
           <p:txBody>
             <a:bodyPr wrap="square" lIns="0" tIns="0" rIns="0" bIns="0" rtlCol="0"/>
             <a:lstStyle/>
-            <a:p/>
+            <a:p>
+              <a:endParaRPr/>
+            </a:p>
           </p:txBody>
         </p:sp>
         <p:sp>
@@ -16724,7 +17344,9 @@
           <p:txBody>
             <a:bodyPr wrap="square" lIns="0" tIns="0" rIns="0" bIns="0" rtlCol="0"/>
             <a:lstStyle/>
-            <a:p/>
+            <a:p>
+              <a:endParaRPr/>
+            </a:p>
           </p:txBody>
         </p:sp>
         <p:sp>
@@ -17033,7 +17655,9 @@
           <p:txBody>
             <a:bodyPr wrap="square" lIns="0" tIns="0" rIns="0" bIns="0" rtlCol="0"/>
             <a:lstStyle/>
-            <a:p/>
+            <a:p>
+              <a:endParaRPr/>
+            </a:p>
           </p:txBody>
         </p:sp>
         <p:sp>
@@ -17347,7 +17971,9 @@
           <p:txBody>
             <a:bodyPr wrap="square" lIns="0" tIns="0" rIns="0" bIns="0" rtlCol="0"/>
             <a:lstStyle/>
-            <a:p/>
+            <a:p>
+              <a:endParaRPr/>
+            </a:p>
           </p:txBody>
         </p:sp>
         <p:sp>
@@ -17397,7 +18023,9 @@
           <p:txBody>
             <a:bodyPr wrap="square" lIns="0" tIns="0" rIns="0" bIns="0" rtlCol="0"/>
             <a:lstStyle/>
-            <a:p/>
+            <a:p>
+              <a:endParaRPr/>
+            </a:p>
           </p:txBody>
         </p:sp>
         <p:sp>
@@ -17447,7 +18075,9 @@
           <p:txBody>
             <a:bodyPr wrap="square" lIns="0" tIns="0" rIns="0" bIns="0" rtlCol="0"/>
             <a:lstStyle/>
-            <a:p/>
+            <a:p>
+              <a:endParaRPr/>
+            </a:p>
           </p:txBody>
         </p:sp>
         <p:sp>
@@ -17654,7 +18284,9 @@
           <p:txBody>
             <a:bodyPr wrap="square" lIns="0" tIns="0" rIns="0" bIns="0" rtlCol="0"/>
             <a:lstStyle/>
-            <a:p/>
+            <a:p>
+              <a:endParaRPr/>
+            </a:p>
           </p:txBody>
         </p:sp>
         <p:sp>
@@ -17866,7 +18498,9 @@
           <p:txBody>
             <a:bodyPr wrap="square" lIns="0" tIns="0" rIns="0" bIns="0" rtlCol="0"/>
             <a:lstStyle/>
-            <a:p/>
+            <a:p>
+              <a:endParaRPr/>
+            </a:p>
           </p:txBody>
         </p:sp>
         <p:sp>
@@ -17916,7 +18550,9 @@
           <p:txBody>
             <a:bodyPr wrap="square" lIns="0" tIns="0" rIns="0" bIns="0" rtlCol="0"/>
             <a:lstStyle/>
-            <a:p/>
+            <a:p>
+              <a:endParaRPr/>
+            </a:p>
           </p:txBody>
         </p:sp>
         <p:sp>
@@ -17966,7 +18602,9 @@
           <p:txBody>
             <a:bodyPr wrap="square" lIns="0" tIns="0" rIns="0" bIns="0" rtlCol="0"/>
             <a:lstStyle/>
-            <a:p/>
+            <a:p>
+              <a:endParaRPr/>
+            </a:p>
           </p:txBody>
         </p:sp>
         <p:sp>
@@ -18077,7 +18715,9 @@
           <p:txBody>
             <a:bodyPr wrap="square" lIns="0" tIns="0" rIns="0" bIns="0" rtlCol="0"/>
             <a:lstStyle/>
-            <a:p/>
+            <a:p>
+              <a:endParaRPr/>
+            </a:p>
           </p:txBody>
         </p:sp>
         <p:sp>
@@ -18193,7 +18833,9 @@
           <p:txBody>
             <a:bodyPr wrap="square" lIns="0" tIns="0" rIns="0" bIns="0" rtlCol="0"/>
             <a:lstStyle/>
-            <a:p/>
+            <a:p>
+              <a:endParaRPr/>
+            </a:p>
           </p:txBody>
         </p:sp>
         <p:sp>
@@ -18243,7 +18885,9 @@
           <p:txBody>
             <a:bodyPr wrap="square" lIns="0" tIns="0" rIns="0" bIns="0" rtlCol="0"/>
             <a:lstStyle/>
-            <a:p/>
+            <a:p>
+              <a:endParaRPr/>
+            </a:p>
           </p:txBody>
         </p:sp>
         <p:sp>
@@ -18293,7 +18937,9 @@
           <p:txBody>
             <a:bodyPr wrap="square" lIns="0" tIns="0" rIns="0" bIns="0" rtlCol="0"/>
             <a:lstStyle/>
-            <a:p/>
+            <a:p>
+              <a:endParaRPr/>
+            </a:p>
           </p:txBody>
         </p:sp>
       </p:grpSp>
@@ -18492,14 +19138,7 @@
                 <a:latin typeface="Tahoma" panose="020B0604030504040204"/>
                 <a:cs typeface="Tahoma" panose="020B0604030504040204"/>
               </a:rPr>
-              <a:t>d</a:t>
-            </a:r>
-            <a:r>
-              <a:rPr sz="2800" b="1" spc="-215" dirty="0">
-                <a:latin typeface="Tahoma" panose="020B0604030504040204"/>
-                <a:cs typeface="Tahoma" panose="020B0604030504040204"/>
-              </a:rPr>
-              <a:t>a</a:t>
+              <a:t>da</a:t>
             </a:r>
             <a:r>
               <a:rPr sz="2800" b="1" spc="-185" dirty="0">
@@ -18903,9 +19542,11 @@
         <p:spPr/>
         <p:txBody>
           <a:bodyPr/>
+          <a:lstStyle/>
           <a:p>
             <a:fld id="{B6F15528-21DE-4FAA-801E-634DDDAF4B2B}" type="slidenum">
               <a:rPr/>
+              <a:t>9</a:t>
             </a:fld>
             <a:endParaRPr/>
           </a:p>
@@ -19200,6 +19841,8 @@
       </a:bgFillStyleLst>
     </a:fmtScheme>
   </a:themeElements>
+  <a:objectDefaults/>
+  <a:extraClrSchemeLst/>
   <a:extLst>
     <a:ext uri="{05A4C25C-085E-4340-85A3-A5531E510DB2}">
       <thm15:themeFamily xmlns:thm15="http://schemas.microsoft.com/office/thememl/2012/main" name="Office Theme" id="{62F939B6-93AF-4DB8-9C6B-D6C7DFDC589F}" vid="{4A3C46E8-61CC-4603-A589-7422A47A8E4A}"/>
@@ -19459,6 +20102,8 @@
       </a:bgFillStyleLst>
     </a:fmtScheme>
   </a:themeElements>
+  <a:objectDefaults/>
+  <a:extraClrSchemeLst/>
   <a:extLst>
     <a:ext uri="{05A4C25C-085E-4340-85A3-A5531E510DB2}">
       <thm15:themeFamily xmlns:thm15="http://schemas.microsoft.com/office/thememl/2012/main" name="Office Theme" id="{62F939B6-93AF-4DB8-9C6B-D6C7DFDC589F}" vid="{4A3C46E8-61CC-4603-A589-7422A47A8E4A}"/>

--- a/Training Materials/19. MongoDB 8.2/Slides/5. Indexing/5-mongodb-introduction-m5-slides.pptx
+++ b/Training Materials/19. MongoDB 8.2/Slides/5. Indexing/5-mongodb-introduction-m5-slides.pptx
@@ -213,7 +213,7 @@
           <a:p>
             <a:fld id="{3EFD42F7-718C-4B98-AAEC-167E6DDD60A7}" type="datetimeFigureOut">
               <a:rPr lang="en-US" smtClean="0"/>
-              <a:t>2/7/2026</a:t>
+              <a:t>2/10/2026</a:t>
             </a:fld>
             <a:endParaRPr lang="en-US"/>
           </a:p>
@@ -620,7 +620,7 @@
           <a:p>
             <a:fld id="{1D8BD707-D9CF-40AE-B4C6-C98DA3205C09}" type="datetimeFigureOut">
               <a:rPr lang="en-US"/>
-              <a:t>2/7/2026</a:t>
+              <a:t>2/10/2026</a:t>
             </a:fld>
             <a:endParaRPr lang="en-US"/>
           </a:p>
@@ -799,7 +799,7 @@
           <a:p>
             <a:fld id="{1D8BD707-D9CF-40AE-B4C6-C98DA3205C09}" type="datetimeFigureOut">
               <a:rPr lang="en-US"/>
-              <a:t>2/7/2026</a:t>
+              <a:t>2/10/2026</a:t>
             </a:fld>
             <a:endParaRPr lang="en-US"/>
           </a:p>
@@ -1015,7 +1015,7 @@
           <a:p>
             <a:fld id="{1D8BD707-D9CF-40AE-B4C6-C98DA3205C09}" type="datetimeFigureOut">
               <a:rPr lang="en-US"/>
-              <a:t>2/7/2026</a:t>
+              <a:t>2/10/2026</a:t>
             </a:fld>
             <a:endParaRPr lang="en-US"/>
           </a:p>
@@ -1165,7 +1165,7 @@
           <a:p>
             <a:fld id="{1D8BD707-D9CF-40AE-B4C6-C98DA3205C09}" type="datetimeFigureOut">
               <a:rPr lang="en-US"/>
-              <a:t>2/7/2026</a:t>
+              <a:t>2/10/2026</a:t>
             </a:fld>
             <a:endParaRPr lang="en-US"/>
           </a:p>
@@ -1286,7 +1286,7 @@
           <a:p>
             <a:fld id="{1D8BD707-D9CF-40AE-B4C6-C98DA3205C09}" type="datetimeFigureOut">
               <a:rPr lang="en-US"/>
-              <a:t>2/7/2026</a:t>
+              <a:t>2/10/2026</a:t>
             </a:fld>
             <a:endParaRPr lang="en-US"/>
           </a:p>
@@ -1513,7 +1513,7 @@
           <a:p>
             <a:fld id="{1D8BD707-D9CF-40AE-B4C6-C98DA3205C09}" type="datetimeFigureOut">
               <a:rPr lang="en-US"/>
-              <a:t>2/7/2026</a:t>
+              <a:t>2/10/2026</a:t>
             </a:fld>
             <a:endParaRPr lang="en-US"/>
           </a:p>
@@ -14187,7 +14187,7 @@
           <p:nvPr>
             <p:extLst>
               <p:ext uri="{D42A27DB-BD31-4B8C-83A1-F6EECF244321}">
-                <p14:modId xmlns:p14="http://schemas.microsoft.com/office/powerpoint/2010/main" val="4028496232"/>
+                <p14:modId xmlns:p14="http://schemas.microsoft.com/office/powerpoint/2010/main" val="301475695"/>
               </p:ext>
             </p:extLst>
           </p:nvPr>
@@ -14210,14 +14210,14 @@
                     </a:ext>
                   </a:extLst>
                 </a:gridCol>
-                <a:gridCol w="2690495">
+                <a:gridCol w="2640331">
                   <a:extLst>
                     <a:ext uri="{9D8B030D-6E8A-4147-A177-3AD203B41FA5}">
                       <a16:colId xmlns:a16="http://schemas.microsoft.com/office/drawing/2014/main" val="65351399"/>
                     </a:ext>
                   </a:extLst>
                 </a:gridCol>
-                <a:gridCol w="2690495">
+                <a:gridCol w="2740659">
                   <a:extLst>
                     <a:ext uri="{9D8B030D-6E8A-4147-A177-3AD203B41FA5}">
                       <a16:colId xmlns:a16="http://schemas.microsoft.com/office/drawing/2014/main" val="1890627057"/>
@@ -14344,12 +14344,18 @@
                         <a:buNone/>
                       </a:pPr>
                       <a:r>
-                        <a:rPr lang="en-IN" sz="2000">
+                        <a:rPr lang="en-IN" sz="2000" dirty="0" err="1">
                           <a:effectLst/>
                         </a:rPr>
-                        <a:t>nscanned </a:t>
+                        <a:t>nscanned</a:t>
                       </a:r>
-                      <a:endParaRPr lang="en-IN" sz="2000">
+                      <a:r>
+                        <a:rPr lang="en-IN" sz="2000" dirty="0">
+                          <a:effectLst/>
+                        </a:rPr>
+                        <a:t> </a:t>
+                      </a:r>
+                      <a:endParaRPr lang="en-IN" sz="2000" dirty="0">
                         <a:effectLst/>
                         <a:latin typeface="Calibri" panose="020F0502020204030204" pitchFamily="34" charset="0"/>
                         <a:ea typeface="Calibri" panose="020F0502020204030204" pitchFamily="34" charset="0"/>
@@ -14374,12 +14380,12 @@
                         <a:buNone/>
                       </a:pPr>
                       <a:r>
-                        <a:rPr lang="en-IN" sz="2000">
+                        <a:rPr lang="en-IN" sz="2000" dirty="0" err="1">
                           <a:effectLst/>
                         </a:rPr>
                         <a:t>totalKeysExamined</a:t>
                       </a:r>
-                      <a:endParaRPr lang="en-IN" sz="2000">
+                      <a:endParaRPr lang="en-IN" sz="2000" dirty="0">
                         <a:effectLst/>
                         <a:latin typeface="Calibri" panose="020F0502020204030204" pitchFamily="34" charset="0"/>
                         <a:ea typeface="Calibri" panose="020F0502020204030204" pitchFamily="34" charset="0"/>
@@ -14404,12 +14410,12 @@
                         <a:buNone/>
                       </a:pPr>
                       <a:r>
-                        <a:rPr lang="en-IN" sz="2000">
+                        <a:rPr lang="en-IN" sz="2000" dirty="0">
                           <a:effectLst/>
                         </a:rPr>
                         <a:t>The number of index entries the database had to look at.</a:t>
                       </a:r>
-                      <a:endParaRPr lang="en-IN" sz="2000">
+                      <a:endParaRPr lang="en-IN" sz="2000" dirty="0">
                         <a:effectLst/>
                         <a:latin typeface="Calibri" panose="020F0502020204030204" pitchFamily="34" charset="0"/>
                         <a:ea typeface="Calibri" panose="020F0502020204030204" pitchFamily="34" charset="0"/>
@@ -14441,12 +14447,12 @@
                         <a:buNone/>
                       </a:pPr>
                       <a:r>
-                        <a:rPr lang="en-IN" sz="2000">
+                        <a:rPr lang="en-IN" sz="2000" dirty="0" err="1">
                           <a:effectLst/>
                         </a:rPr>
                         <a:t>nscannedObjects</a:t>
                       </a:r>
-                      <a:endParaRPr lang="en-IN" sz="2000">
+                      <a:endParaRPr lang="en-IN" sz="2000" dirty="0">
                         <a:effectLst/>
                         <a:latin typeface="Calibri" panose="020F0502020204030204" pitchFamily="34" charset="0"/>
                         <a:ea typeface="Calibri" panose="020F0502020204030204" pitchFamily="34" charset="0"/>
@@ -14501,12 +14507,12 @@
                         <a:buNone/>
                       </a:pPr>
                       <a:r>
-                        <a:rPr lang="en-IN" sz="2000">
+                        <a:rPr lang="en-IN" sz="2000" dirty="0">
                           <a:effectLst/>
                         </a:rPr>
                         <a:t>The actual number of documents loaded from disk.</a:t>
                       </a:r>
-                      <a:endParaRPr lang="en-IN" sz="2000">
+                      <a:endParaRPr lang="en-IN" sz="2000" dirty="0">
                         <a:effectLst/>
                         <a:latin typeface="Calibri" panose="020F0502020204030204" pitchFamily="34" charset="0"/>
                         <a:ea typeface="Calibri" panose="020F0502020204030204" pitchFamily="34" charset="0"/>
@@ -14538,12 +14544,12 @@
                         <a:buNone/>
                       </a:pPr>
                       <a:r>
-                        <a:rPr lang="en-IN" sz="2000">
+                        <a:rPr lang="en-IN" sz="2000" dirty="0">
                           <a:effectLst/>
                         </a:rPr>
                         <a:t>n</a:t>
                       </a:r>
-                      <a:endParaRPr lang="en-IN" sz="2000">
+                      <a:endParaRPr lang="en-IN" sz="2000" dirty="0">
                         <a:effectLst/>
                         <a:latin typeface="Calibri" panose="020F0502020204030204" pitchFamily="34" charset="0"/>
                         <a:ea typeface="Calibri" panose="020F0502020204030204" pitchFamily="34" charset="0"/>
